--- a/presentation-v3.pptx
+++ b/presentation-v3.pptx
@@ -7,11 +7,11 @@
   <p:sldIdLst>
     <p:sldId id="256" r:id="rId7"/>
     <p:sldId id="257" r:id="rId8"/>
+    <p:sldId id="259" r:id="rId10"/>
+    <p:sldId id="262" r:id="rId13"/>
+    <p:sldId id="261" r:id="rId12"/>
     <p:sldId id="258" r:id="rId9"/>
-    <p:sldId id="259" r:id="rId10"/>
     <p:sldId id="260" r:id="rId11"/>
-    <p:sldId id="261" r:id="rId12"/>
-    <p:sldId id="262" r:id="rId13"/>
   </p:sldIdLst>
   <p:sldSz cx="12191695" cy="6858000" type="screen4x3"/>
   <p:notesSz cx="6858000" cy="9144000"/>
@@ -18517,14 +18517,6 @@
 <file path=ppt/slides/slide7.xml><?xml version="1.0" encoding="utf-8"?>
 <p:sld xmlns:a="http://schemas.openxmlformats.org/drawingml/2006/main" xmlns:p="http://schemas.openxmlformats.org/presentationml/2006/main" xmlns:r="http://schemas.openxmlformats.org/officeDocument/2006/relationships">
   <p:cSld>
-    <p:bg>
-      <p:bgPr>
-        <a:solidFill>
-          <a:srgbClr val="0F1424"/>
-        </a:solidFill>
-        <a:effectLst/>
-      </p:bgPr>
-    </p:bg>
     <p:spTree>
       <p:nvGrpSpPr>
         <p:cNvPr id="1" name=""/>
@@ -18541,13 +18533,13 @@
         <p:spPr>
           <a:xfrm>
             <a:off x="0" y="0"/>
-            <a:ext cx="12191695" cy="777240"/>
+            <a:ext cx="12191695" cy="762000"/>
           </a:xfrm>
           <a:prstGeom prst="rect">
             <a:avLst/>
           </a:prstGeom>
           <a:solidFill>
-            <a:srgbClr val="0A0E1A"/>
+            <a:srgbClr val="232F3E"/>
           </a:solidFill>
           <a:ln>
             <a:noFill/>
@@ -18568,52 +18560,137 @@
           </a:fontRef>
         </p:style>
         <p:txBody>
-          <a:bodyPr rtlCol="0" anchor="ctr" wrap="square"/>
+          <a:bodyPr rtlCol="0" anchor="ctr"/>
           <a:lstStyle/>
           <a:p>
             <a:pPr algn="ctr"/>
-            <a:r>
-              <a:rPr sz="2400" b="1">
+          </a:p>
+        </p:txBody>
+      </p:sp>
+      <p:sp>
+        <p:nvSpPr>
+          <p:cNvPr id="3" name="TextBox 2"/>
+          <p:cNvSpPr txBox="1"/>
+          <p:nvPr/>
+        </p:nvSpPr>
+        <p:spPr>
+          <a:xfrm>
+            <a:off x="400000" y="130000"/>
+            <a:ext cx="7000000" cy="350000"/>
+          </a:xfrm>
+          <a:prstGeom prst="rect">
+            <a:avLst/>
+          </a:prstGeom>
+          <a:noFill/>
+        </p:spPr>
+        <p:txBody>
+          <a:bodyPr wrap="square">
+            <a:spAutoFit/>
+          </a:bodyPr>
+          <a:lstStyle/>
+          <a:p>
+            <a:pPr>
+              <a:defRPr sz="2600" b="1">
                 <a:solidFill>
                   <a:srgbClr val="FFFFFF"/>
                 </a:solidFill>
-              </a:rPr>
-              <a:t>Key Decisions &amp; Blockers</a:t>
-            </a:r>
-          </a:p>
-          <a:p>
-            <a:r>
-              <a:rPr sz="1200">
-                <a:solidFill>
-                  <a:srgbClr val="94A3B8"/>
-                </a:solidFill>
-              </a:rPr>
-              <a:t>Architecture decisions requiring approval and critical blockers to resolve</a:t>
-            </a:r>
-          </a:p>
-        </p:txBody>
-      </p:sp>
-      <p:sp>
-        <p:nvSpPr>
-          <p:cNvPr id="3" name="Rounded Rectangle 2"/>
+              </a:defRPr>
+            </a:pPr>
+            <a:r>
+              <a:t>High-Level Task Breakdown</a:t>
+            </a:r>
+          </a:p>
+        </p:txBody>
+      </p:sp>
+      <p:sp>
+        <p:nvSpPr>
+          <p:cNvPr id="4" name="TextBox 3"/>
+          <p:cNvSpPr txBox="1"/>
+          <p:nvPr/>
+        </p:nvSpPr>
+        <p:spPr>
+          <a:xfrm>
+            <a:off x="400000" y="480000"/>
+            <a:ext cx="8000000" cy="250000"/>
+          </a:xfrm>
+          <a:prstGeom prst="rect">
+            <a:avLst/>
+          </a:prstGeom>
+          <a:noFill/>
+        </p:spPr>
+        <p:txBody>
+          <a:bodyPr wrap="none">
+            <a:spAutoFit/>
+          </a:bodyPr>
+          <a:lstStyle/>
+          <a:p>
+            <a:pPr>
+              <a:defRPr sz="1300">
+                <a:solidFill>
+                  <a:srgbClr val="CCCCCC"/>
+                </a:solidFill>
+              </a:defRPr>
+            </a:pPr>
+            <a:r>
+              <a:t>Key workstreams for Platform, Producer, and Consumer teams to enable multi-region resiliency</a:t>
+            </a:r>
+          </a:p>
+        </p:txBody>
+      </p:sp>
+      <p:sp>
+        <p:nvSpPr>
+          <p:cNvPr id="5" name="TextBox 4"/>
+          <p:cNvSpPr txBox="1"/>
+          <p:nvPr/>
+        </p:nvSpPr>
+        <p:spPr>
+          <a:xfrm>
+            <a:off x="10991695" y="280000"/>
+            <a:ext cx="900000" cy="250000"/>
+          </a:xfrm>
+          <a:prstGeom prst="rect">
+            <a:avLst/>
+          </a:prstGeom>
+          <a:noFill/>
+        </p:spPr>
+        <p:txBody>
+          <a:bodyPr wrap="none">
+            <a:spAutoFit/>
+          </a:bodyPr>
+          <a:lstStyle/>
+          <a:p>
+            <a:pPr algn="r">
+              <a:defRPr sz="1200">
+                <a:solidFill>
+                  <a:srgbClr val="AAAAAA"/>
+                </a:solidFill>
+              </a:defRPr>
+            </a:pPr>
+            <a:r>
+              <a:t>7 / 7</a:t>
+            </a:r>
+          </a:p>
+        </p:txBody>
+      </p:sp>
+      <p:sp>
+        <p:nvSpPr>
+          <p:cNvPr id="6" name="Rectangle 5"/>
           <p:cNvSpPr/>
           <p:nvPr/>
         </p:nvSpPr>
         <p:spPr>
           <a:xfrm>
-            <a:off x="11277295" y="182880"/>
-            <a:ext cx="731520" cy="320040"/>
-          </a:xfrm>
-          <a:prstGeom prst="roundRect">
+            <a:off x="300000" y="900000"/>
+            <a:ext cx="4200000" cy="520000"/>
+          </a:xfrm>
+          <a:prstGeom prst="rect">
             <a:avLst/>
           </a:prstGeom>
           <a:solidFill>
-            <a:srgbClr val="1A2138"/>
+            <a:srgbClr val="4053D6"/>
           </a:solidFill>
-          <a:ln w="12700">
-            <a:solidFill>
-              <a:srgbClr val="2A3560"/>
-            </a:solidFill>
+          <a:ln>
+            <a:noFill/>
           </a:ln>
         </p:spPr>
         <p:style>
@@ -18635,27 +18712,54 @@
           <a:lstStyle/>
           <a:p>
             <a:pPr algn="ctr"/>
-            <a:r>
-              <a:rPr sz="1100">
-                <a:solidFill>
-                  <a:srgbClr val="64748B"/>
-                </a:solidFill>
-              </a:rPr>
-              <a:t>7 / 7</a:t>
-            </a:r>
-          </a:p>
-        </p:txBody>
-      </p:sp>
-      <p:sp>
-        <p:nvSpPr>
-          <p:cNvPr id="4" name="TextBox 3"/>
+          </a:p>
+        </p:txBody>
+      </p:sp>
+      <p:sp>
+        <p:nvSpPr>
+          <p:cNvPr id="7" name="TextBox 6"/>
           <p:cNvSpPr txBox="1"/>
           <p:nvPr/>
         </p:nvSpPr>
         <p:spPr>
           <a:xfrm>
-            <a:off x="274320" y="6537960"/>
-            <a:ext cx="5486400" cy="274320"/>
+            <a:off x="420000" y="980000"/>
+            <a:ext cx="4000000" cy="250000"/>
+          </a:xfrm>
+          <a:prstGeom prst="rect">
+            <a:avLst/>
+          </a:prstGeom>
+          <a:noFill/>
+        </p:spPr>
+        <p:txBody>
+          <a:bodyPr wrap="square">
+            <a:spAutoFit/>
+          </a:bodyPr>
+          <a:lstStyle/>
+          <a:p>
+            <a:pPr>
+              <a:defRPr sz="1600" b="1">
+                <a:solidFill>
+                  <a:srgbClr val="FFFFFF"/>
+                </a:solidFill>
+              </a:defRPr>
+            </a:pPr>
+            <a:r>
+              <a:t>Platform Tasks</a:t>
+            </a:r>
+          </a:p>
+        </p:txBody>
+      </p:sp>
+      <p:sp>
+        <p:nvSpPr>
+          <p:cNvPr id="8" name="TextBox 7"/>
+          <p:cNvSpPr txBox="1"/>
+          <p:nvPr/>
+        </p:nvSpPr>
+        <p:spPr>
+          <a:xfrm>
+            <a:off x="420000" y="1220000"/>
+            <a:ext cx="4000000" cy="200000"/>
           </a:xfrm>
           <a:prstGeom prst="rect">
             <a:avLst/>
@@ -18668,1776 +18772,38 @@
           </a:bodyPr>
           <a:lstStyle/>
           <a:p>
-            <a:r>
-              <a:rPr sz="900">
-                <a:solidFill>
-                  <a:srgbClr val="64748B"/>
-                </a:solidFill>
-              </a:rPr>
-              <a:t>Data Mesh Multi-Region Resiliency — April 2026</a:t>
-            </a:r>
-          </a:p>
-        </p:txBody>
-      </p:sp>
-      <p:sp>
-        <p:nvSpPr>
-          <p:cNvPr id="5" name="TextBox 4"/>
-          <p:cNvSpPr txBox="1"/>
-          <p:nvPr/>
-        </p:nvSpPr>
-        <p:spPr>
-          <a:xfrm>
-            <a:off x="274320" y="868680"/>
-            <a:ext cx="4572000" cy="228600"/>
+            <a:pPr>
+              <a:defRPr sz="1000">
+                <a:solidFill>
+                  <a:srgbClr val="CCCCCC"/>
+                </a:solidFill>
+              </a:defRPr>
+            </a:pPr>
+            <a:r>
+              <a:t>Data Mesh Platform Team</a:t>
+            </a:r>
+          </a:p>
+        </p:txBody>
+      </p:sp>
+      <p:sp>
+        <p:nvSpPr>
+          <p:cNvPr id="9" name="Rectangle 8"/>
+          <p:cNvSpPr/>
+          <p:nvPr/>
+        </p:nvSpPr>
+        <p:spPr>
+          <a:xfrm>
+            <a:off x="4640000" y="900000"/>
+            <a:ext cx="3300000" cy="520000"/>
           </a:xfrm>
           <a:prstGeom prst="rect">
             <a:avLst/>
           </a:prstGeom>
-          <a:noFill/>
-        </p:spPr>
-        <p:txBody>
-          <a:bodyPr wrap="square" lIns="50800" rIns="50800" tIns="25400" bIns="25400">
-            <a:spAutoFit/>
-          </a:bodyPr>
-          <a:lstStyle/>
-          <a:p>
-            <a:pPr algn="l"/>
-            <a:r>
-              <a:rPr sz="1300" b="1">
-                <a:solidFill>
-                  <a:srgbClr val="FFFFFF"/>
-                </a:solidFill>
-              </a:rPr>
-              <a:t>Pending Decisions</a:t>
-            </a:r>
-          </a:p>
-        </p:txBody>
-      </p:sp>
-      <p:graphicFrame>
-        <p:nvGraphicFramePr>
-          <p:cNvPr id="6" name="Table 5"/>
-          <p:cNvGraphicFramePr>
-            <a:graphicFrameLocks noGrp="1"/>
-          </p:cNvGraphicFramePr>
-          <p:nvPr/>
-        </p:nvGraphicFramePr>
-        <p:xfrm>
-          <a:off x="274320" y="1115568"/>
-          <a:ext cx="5669280" cy="2743200"/>
-        </p:xfrm>
-        <a:graphic>
-          <a:graphicData uri="http://schemas.openxmlformats.org/drawingml/2006/table">
-            <a:tbl>
-              <a:tblPr firstRow="1" bandRow="1">
-                <a:tableStyleId>{5C22544A-7EE6-4342-B048-85BDC9FD1C3A}</a:tableStyleId>
-              </a:tblPr>
-              <a:tblGrid>
-                <a:gridCol w="365760"/>
-                <a:gridCol w="2286000"/>
-                <a:gridCol w="3017520"/>
-              </a:tblGrid>
-              <a:tr h="228600">
-                <a:tc>
-                  <a:txBody>
-                    <a:bodyPr/>
-                    <a:lstStyle/>
-                    <a:p>
-                      <a:r>
-                        <a:rPr sz="800" b="1">
-                          <a:solidFill>
-                            <a:srgbClr val="94A3B8"/>
-                          </a:solidFill>
-                        </a:rPr>
-                        <a:t>#</a:t>
-                      </a:r>
-                    </a:p>
-                  </a:txBody>
-                  <a:tcPr marL="50800" marR="50800" marT="25400" marB="25400">
-                    <a:solidFill>
-                      <a:srgbClr val="151B2E"/>
-                    </a:solidFill>
-                  </a:tcPr>
-                </a:tc>
-                <a:tc>
-                  <a:txBody>
-                    <a:bodyPr/>
-                    <a:lstStyle/>
-                    <a:p>
-                      <a:r>
-                        <a:rPr sz="800" b="1">
-                          <a:solidFill>
-                            <a:srgbClr val="94A3B8"/>
-                          </a:solidFill>
-                        </a:rPr>
-                        <a:t>Decision</a:t>
-                      </a:r>
-                    </a:p>
-                  </a:txBody>
-                  <a:tcPr marL="50800" marR="50800" marT="25400" marB="25400">
-                    <a:solidFill>
-                      <a:srgbClr val="151B2E"/>
-                    </a:solidFill>
-                  </a:tcPr>
-                </a:tc>
-                <a:tc>
-                  <a:txBody>
-                    <a:bodyPr/>
-                    <a:lstStyle/>
-                    <a:p>
-                      <a:r>
-                        <a:rPr sz="800" b="1">
-                          <a:solidFill>
-                            <a:srgbClr val="94A3B8"/>
-                          </a:solidFill>
-                        </a:rPr>
-                        <a:t>Recommendation</a:t>
-                      </a:r>
-                    </a:p>
-                  </a:txBody>
-                  <a:tcPr marL="50800" marR="50800" marT="25400" marB="25400">
-                    <a:solidFill>
-                      <a:srgbClr val="151B2E"/>
-                    </a:solidFill>
-                  </a:tcPr>
-                </a:tc>
-              </a:tr>
-              <a:tr h="228600">
-                <a:tc>
-                  <a:txBody>
-                    <a:bodyPr/>
-                    <a:lstStyle/>
-                    <a:p>
-                      <a:r>
-                        <a:rPr sz="800">
-                          <a:solidFill>
-                            <a:srgbClr val="E2E8F0"/>
-                          </a:solidFill>
-                        </a:rPr>
-                        <a:t>D1</a:t>
-                      </a:r>
-                    </a:p>
-                  </a:txBody>
-                  <a:tcPr marL="50800" marR="50800" marT="25400" marB="25400">
-                    <a:solidFill>
-                      <a:srgbClr val="121728"/>
-                    </a:solidFill>
-                  </a:tcPr>
-                </a:tc>
-                <a:tc>
-                  <a:txBody>
-                    <a:bodyPr/>
-                    <a:lstStyle/>
-                    <a:p>
-                      <a:r>
-                        <a:rPr sz="800">
-                          <a:solidFill>
-                            <a:srgbClr val="E2E8F0"/>
-                          </a:solidFill>
-                        </a:rPr>
-                        <a:t>Failover strategy</a:t>
-                      </a:r>
-                    </a:p>
-                  </a:txBody>
-                  <a:tcPr marL="50800" marR="50800" marT="25400" marB="25400">
-                    <a:solidFill>
-                      <a:srgbClr val="121728"/>
-                    </a:solidFill>
-                  </a:tcPr>
-                </a:tc>
-                <a:tc>
-                  <a:txBody>
-                    <a:bodyPr/>
-                    <a:lstStyle/>
-                    <a:p>
-                      <a:r>
-                        <a:rPr sz="800">
-                          <a:solidFill>
-                            <a:srgbClr val="E2E8F0"/>
-                          </a:solidFill>
-                        </a:rPr>
-                        <a:t>Active-Passive (Warm Standby)</a:t>
-                      </a:r>
-                    </a:p>
-                  </a:txBody>
-                  <a:tcPr marL="50800" marR="50800" marT="25400" marB="25400">
-                    <a:solidFill>
-                      <a:srgbClr val="121728"/>
-                    </a:solidFill>
-                  </a:tcPr>
-                </a:tc>
-              </a:tr>
-              <a:tr h="228600">
-                <a:tc>
-                  <a:txBody>
-                    <a:bodyPr/>
-                    <a:lstStyle/>
-                    <a:p>
-                      <a:r>
-                        <a:rPr sz="800">
-                          <a:solidFill>
-                            <a:srgbClr val="E2E8F0"/>
-                          </a:solidFill>
-                        </a:rPr>
-                        <a:t>D2</a:t>
-                      </a:r>
-                    </a:p>
-                  </a:txBody>
-                  <a:tcPr marL="50800" marR="50800" marT="25400" marB="25400">
-                    <a:solidFill>
-                      <a:srgbClr val="0F1424"/>
-                    </a:solidFill>
-                  </a:tcPr>
-                </a:tc>
-                <a:tc>
-                  <a:txBody>
-                    <a:bodyPr/>
-                    <a:lstStyle/>
-                    <a:p>
-                      <a:r>
-                        <a:rPr sz="800">
-                          <a:solidFill>
-                            <a:srgbClr val="E2E8F0"/>
-                          </a:solidFill>
-                        </a:rPr>
-                        <a:t>Producer multi-region mandate</a:t>
-                      </a:r>
-                    </a:p>
-                  </a:txBody>
-                  <a:tcPr marL="50800" marR="50800" marT="25400" marB="25400">
-                    <a:solidFill>
-                      <a:srgbClr val="0F1424"/>
-                    </a:solidFill>
-                  </a:tcPr>
-                </a:tc>
-                <a:tc>
-                  <a:txBody>
-                    <a:bodyPr/>
-                    <a:lstStyle/>
-                    <a:p>
-                      <a:r>
-                        <a:rPr sz="800">
-                          <a:solidFill>
-                            <a:srgbClr val="E2E8F0"/>
-                          </a:solidFill>
-                        </a:rPr>
-                        <a:t>Tiered: Tier 1 mandatory, Tier 2 recommended</a:t>
-                      </a:r>
-                    </a:p>
-                  </a:txBody>
-                  <a:tcPr marL="50800" marR="50800" marT="25400" marB="25400">
-                    <a:solidFill>
-                      <a:srgbClr val="0F1424"/>
-                    </a:solidFill>
-                  </a:tcPr>
-                </a:tc>
-              </a:tr>
-              <a:tr h="228600">
-                <a:tc>
-                  <a:txBody>
-                    <a:bodyPr/>
-                    <a:lstStyle/>
-                    <a:p>
-                      <a:r>
-                        <a:rPr sz="800">
-                          <a:solidFill>
-                            <a:srgbClr val="E2E8F0"/>
-                          </a:solidFill>
-                        </a:rPr>
-                        <a:t>D3</a:t>
-                      </a:r>
-                    </a:p>
-                  </a:txBody>
-                  <a:tcPr marL="50800" marR="50800" marT="25400" marB="25400">
-                    <a:solidFill>
-                      <a:srgbClr val="121728"/>
-                    </a:solidFill>
-                  </a:tcPr>
-                </a:tc>
-                <a:tc>
-                  <a:txBody>
-                    <a:bodyPr/>
-                    <a:lstStyle/>
-                    <a:p>
-                      <a:r>
-                        <a:rPr sz="800">
-                          <a:solidFill>
-                            <a:srgbClr val="E2E8F0"/>
-                          </a:solidFill>
-                        </a:rPr>
-                        <a:t>Snowflake edition</a:t>
-                      </a:r>
-                    </a:p>
-                  </a:txBody>
-                  <a:tcPr marL="50800" marR="50800" marT="25400" marB="25400">
-                    <a:solidFill>
-                      <a:srgbClr val="121728"/>
-                    </a:solidFill>
-                  </a:tcPr>
-                </a:tc>
-                <a:tc>
-                  <a:txBody>
-                    <a:bodyPr/>
-                    <a:lstStyle/>
-                    <a:p>
-                      <a:r>
-                        <a:rPr sz="800">
-                          <a:solidFill>
-                            <a:srgbClr val="E2E8F0"/>
-                          </a:solidFill>
-                        </a:rPr>
-                        <a:t>Business Critical (failover groups + Client Redirect)</a:t>
-                      </a:r>
-                    </a:p>
-                  </a:txBody>
-                  <a:tcPr marL="50800" marR="50800" marT="25400" marB="25400">
-                    <a:solidFill>
-                      <a:srgbClr val="121728"/>
-                    </a:solidFill>
-                  </a:tcPr>
-                </a:tc>
-              </a:tr>
-              <a:tr h="228600">
-                <a:tc>
-                  <a:txBody>
-                    <a:bodyPr/>
-                    <a:lstStyle/>
-                    <a:p>
-                      <a:r>
-                        <a:rPr sz="800">
-                          <a:solidFill>
-                            <a:srgbClr val="E2E8F0"/>
-                          </a:solidFill>
-                        </a:rPr>
-                        <a:t>D4</a:t>
-                      </a:r>
-                    </a:p>
-                  </a:txBody>
-                  <a:tcPr marL="50800" marR="50800" marT="25400" marB="25400">
-                    <a:solidFill>
-                      <a:srgbClr val="0F1424"/>
-                    </a:solidFill>
-                  </a:tcPr>
-                </a:tc>
-                <a:tc>
-                  <a:txBody>
-                    <a:bodyPr/>
-                    <a:lstStyle/>
-                    <a:p>
-                      <a:r>
-                        <a:rPr sz="800">
-                          <a:solidFill>
-                            <a:srgbClr val="E2E8F0"/>
-                          </a:solidFill>
-                        </a:rPr>
-                        <a:t>Glue Catalog sync</a:t>
-                      </a:r>
-                    </a:p>
-                  </a:txBody>
-                  <a:tcPr marL="50800" marR="50800" marT="25400" marB="25400">
-                    <a:solidFill>
-                      <a:srgbClr val="0F1424"/>
-                    </a:solidFill>
-                  </a:tcPr>
-                </a:tc>
-                <a:tc>
-                  <a:txBody>
-                    <a:bodyPr/>
-                    <a:lstStyle/>
-                    <a:p>
-                      <a:r>
-                        <a:rPr sz="800">
-                          <a:solidFill>
-                            <a:srgbClr val="E2E8F0"/>
-                          </a:solidFill>
-                        </a:rPr>
-                        <a:t>Dual-write from Notification API</a:t>
-                      </a:r>
-                    </a:p>
-                  </a:txBody>
-                  <a:tcPr marL="50800" marR="50800" marT="25400" marB="25400">
-                    <a:solidFill>
-                      <a:srgbClr val="0F1424"/>
-                    </a:solidFill>
-                  </a:tcPr>
-                </a:tc>
-              </a:tr>
-              <a:tr h="228600">
-                <a:tc>
-                  <a:txBody>
-                    <a:bodyPr/>
-                    <a:lstStyle/>
-                    <a:p>
-                      <a:r>
-                        <a:rPr sz="800">
-                          <a:solidFill>
-                            <a:srgbClr val="E2E8F0"/>
-                          </a:solidFill>
-                        </a:rPr>
-                        <a:t>D5</a:t>
-                      </a:r>
-                    </a:p>
-                  </a:txBody>
-                  <a:tcPr marL="50800" marR="50800" marT="25400" marB="25400">
-                    <a:solidFill>
-                      <a:srgbClr val="121728"/>
-                    </a:solidFill>
-                  </a:tcPr>
-                </a:tc>
-                <a:tc>
-                  <a:txBody>
-                    <a:bodyPr/>
-                    <a:lstStyle/>
-                    <a:p>
-                      <a:r>
-                        <a:rPr sz="800">
-                          <a:solidFill>
-                            <a:srgbClr val="E2E8F0"/>
-                          </a:solidFill>
-                        </a:rPr>
-                        <a:t>SNS notification DR</a:t>
-                      </a:r>
-                    </a:p>
-                  </a:txBody>
-                  <a:tcPr marL="50800" marR="50800" marT="25400" marB="25400">
-                    <a:solidFill>
-                      <a:srgbClr val="121728"/>
-                    </a:solidFill>
-                  </a:tcPr>
-                </a:tc>
-                <a:tc>
-                  <a:txBody>
-                    <a:bodyPr/>
-                    <a:lstStyle/>
-                    <a:p>
-                      <a:r>
-                        <a:rPr sz="800">
-                          <a:solidFill>
-                            <a:srgbClr val="E2E8F0"/>
-                          </a:solidFill>
-                        </a:rPr>
-                        <a:t>Dual-publish (zero consumer action on flip)</a:t>
-                      </a:r>
-                    </a:p>
-                  </a:txBody>
-                  <a:tcPr marL="50800" marR="50800" marT="25400" marB="25400">
-                    <a:solidFill>
-                      <a:srgbClr val="121728"/>
-                    </a:solidFill>
-                  </a:tcPr>
-                </a:tc>
-              </a:tr>
-              <a:tr h="228600">
-                <a:tc>
-                  <a:txBody>
-                    <a:bodyPr/>
-                    <a:lstStyle/>
-                    <a:p>
-                      <a:r>
-                        <a:rPr sz="800">
-                          <a:solidFill>
-                            <a:srgbClr val="E2E8F0"/>
-                          </a:solidFill>
-                        </a:rPr>
-                        <a:t>D6</a:t>
-                      </a:r>
-                    </a:p>
-                  </a:txBody>
-                  <a:tcPr marL="50800" marR="50800" marT="25400" marB="25400">
-                    <a:solidFill>
-                      <a:srgbClr val="0F1424"/>
-                    </a:solidFill>
-                  </a:tcPr>
-                </a:tc>
-                <a:tc>
-                  <a:txBody>
-                    <a:bodyPr/>
-                    <a:lstStyle/>
-                    <a:p>
-                      <a:r>
-                        <a:rPr sz="800">
-                          <a:solidFill>
-                            <a:srgbClr val="E2E8F0"/>
-                          </a:solidFill>
-                        </a:rPr>
-                        <a:t>Kafka connectivity</a:t>
-                      </a:r>
-                    </a:p>
-                  </a:txBody>
-                  <a:tcPr marL="50800" marR="50800" marT="25400" marB="25400">
-                    <a:solidFill>
-                      <a:srgbClr val="0F1424"/>
-                    </a:solidFill>
-                  </a:tcPr>
-                </a:tc>
-                <a:tc>
-                  <a:txBody>
-                    <a:bodyPr/>
-                    <a:lstStyle/>
-                    <a:p>
-                      <a:r>
-                        <a:rPr sz="800">
-                          <a:solidFill>
-                            <a:srgbClr val="E2E8F0"/>
-                          </a:solidFill>
-                        </a:rPr>
-                        <a:t>Provision DX from west2 (4-8 week lead)</a:t>
-                      </a:r>
-                    </a:p>
-                  </a:txBody>
-                  <a:tcPr marL="50800" marR="50800" marT="25400" marB="25400">
-                    <a:solidFill>
-                      <a:srgbClr val="0F1424"/>
-                    </a:solidFill>
-                  </a:tcPr>
-                </a:tc>
-              </a:tr>
-              <a:tr h="228600">
-                <a:tc>
-                  <a:txBody>
-                    <a:bodyPr/>
-                    <a:lstStyle/>
-                    <a:p>
-                      <a:r>
-                        <a:rPr sz="800">
-                          <a:solidFill>
-                            <a:srgbClr val="E2E8F0"/>
-                          </a:solidFill>
-                        </a:rPr>
-                        <a:t>D7</a:t>
-                      </a:r>
-                    </a:p>
-                  </a:txBody>
-                  <a:tcPr marL="50800" marR="50800" marT="25400" marB="25400">
-                    <a:solidFill>
-                      <a:srgbClr val="121728"/>
-                    </a:solidFill>
-                  </a:tcPr>
-                </a:tc>
-                <a:tc>
-                  <a:txBody>
-                    <a:bodyPr/>
-                    <a:lstStyle/>
-                    <a:p>
-                      <a:r>
-                        <a:rPr sz="800">
-                          <a:solidFill>
-                            <a:srgbClr val="E2E8F0"/>
-                          </a:solidFill>
-                        </a:rPr>
-                        <a:t>Failover trigger</a:t>
-                      </a:r>
-                    </a:p>
-                  </a:txBody>
-                  <a:tcPr marL="50800" marR="50800" marT="25400" marB="25400">
-                    <a:solidFill>
-                      <a:srgbClr val="121728"/>
-                    </a:solidFill>
-                  </a:tcPr>
-                </a:tc>
-                <a:tc>
-                  <a:txBody>
-                    <a:bodyPr/>
-                    <a:lstStyle/>
-                    <a:p>
-                      <a:r>
-                        <a:rPr sz="800">
-                          <a:solidFill>
-                            <a:srgbClr val="E2E8F0"/>
-                          </a:solidFill>
-                        </a:rPr>
-                        <a:t>Manual with automated alerting</a:t>
-                      </a:r>
-                    </a:p>
-                  </a:txBody>
-                  <a:tcPr marL="50800" marR="50800" marT="25400" marB="25400">
-                    <a:solidFill>
-                      <a:srgbClr val="121728"/>
-                    </a:solidFill>
-                  </a:tcPr>
-                </a:tc>
-              </a:tr>
-              <a:tr h="228600">
-                <a:tc>
-                  <a:txBody>
-                    <a:bodyPr/>
-                    <a:lstStyle/>
-                    <a:p>
-                      <a:r>
-                        <a:rPr sz="800">
-                          <a:solidFill>
-                            <a:srgbClr val="E2E8F0"/>
-                          </a:solidFill>
-                        </a:rPr>
-                        <a:t>D8</a:t>
-                      </a:r>
-                    </a:p>
-                  </a:txBody>
-                  <a:tcPr marL="50800" marR="50800" marT="25400" marB="25400">
-                    <a:solidFill>
-                      <a:srgbClr val="0F1424"/>
-                    </a:solidFill>
-                  </a:tcPr>
-                </a:tc>
-                <a:tc>
-                  <a:txBody>
-                    <a:bodyPr/>
-                    <a:lstStyle/>
-                    <a:p>
-                      <a:r>
-                        <a:rPr sz="800">
-                          <a:solidFill>
-                            <a:srgbClr val="E2E8F0"/>
-                          </a:solidFill>
-                        </a:rPr>
-                        <a:t>Consumer connections</a:t>
-                      </a:r>
-                    </a:p>
-                  </a:txBody>
-                  <a:tcPr marL="50800" marR="50800" marT="25400" marB="25400">
-                    <a:solidFill>
-                      <a:srgbClr val="0F1424"/>
-                    </a:solidFill>
-                  </a:tcPr>
-                </a:tc>
-                <a:tc>
-                  <a:txBody>
-                    <a:bodyPr/>
-                    <a:lstStyle/>
-                    <a:p>
-                      <a:r>
-                        <a:rPr sz="800">
-                          <a:solidFill>
-                            <a:srgbClr val="E2E8F0"/>
-                          </a:solidFill>
-                        </a:rPr>
-                        <a:t>CNAME for SB/DBX; Client Redirect for SF</a:t>
-                      </a:r>
-                    </a:p>
-                  </a:txBody>
-                  <a:tcPr marL="50800" marR="50800" marT="25400" marB="25400">
-                    <a:solidFill>
-                      <a:srgbClr val="0F1424"/>
-                    </a:solidFill>
-                  </a:tcPr>
-                </a:tc>
-              </a:tr>
-              <a:tr h="228600">
-                <a:tc>
-                  <a:txBody>
-                    <a:bodyPr/>
-                    <a:lstStyle/>
-                    <a:p>
-                      <a:r>
-                        <a:rPr sz="800">
-                          <a:solidFill>
-                            <a:srgbClr val="E2E8F0"/>
-                          </a:solidFill>
-                        </a:rPr>
-                        <a:t>D9</a:t>
-                      </a:r>
-                    </a:p>
-                  </a:txBody>
-                  <a:tcPr marL="50800" marR="50800" marT="25400" marB="25400">
-                    <a:solidFill>
-                      <a:srgbClr val="121728"/>
-                    </a:solidFill>
-                  </a:tcPr>
-                </a:tc>
-                <a:tc>
-                  <a:txBody>
-                    <a:bodyPr/>
-                    <a:lstStyle/>
-                    <a:p>
-                      <a:r>
-                        <a:rPr sz="800">
-                          <a:solidFill>
-                            <a:srgbClr val="E2E8F0"/>
-                          </a:solidFill>
-                        </a:rPr>
-                        <a:t>SF Private Listing + Iceberg</a:t>
-                      </a:r>
-                    </a:p>
-                  </a:txBody>
-                  <a:tcPr marL="50800" marR="50800" marT="25400" marB="25400">
-                    <a:solidFill>
-                      <a:srgbClr val="121728"/>
-                    </a:solidFill>
-                  </a:tcPr>
-                </a:tc>
-                <a:tc>
-                  <a:txBody>
-                    <a:bodyPr/>
-                    <a:lstStyle/>
-                    <a:p>
-                      <a:r>
-                        <a:rPr sz="800">
-                          <a:solidFill>
-                            <a:srgbClr val="E2E8F0"/>
-                          </a:solidFill>
-                        </a:rPr>
-                        <a:t>Validate with SF support (see B2)</a:t>
-                      </a:r>
-                    </a:p>
-                  </a:txBody>
-                  <a:tcPr marL="50800" marR="50800" marT="25400" marB="25400">
-                    <a:solidFill>
-                      <a:srgbClr val="121728"/>
-                    </a:solidFill>
-                  </a:tcPr>
-                </a:tc>
-              </a:tr>
-              <a:tr h="228600">
-                <a:tc>
-                  <a:txBody>
-                    <a:bodyPr/>
-                    <a:lstStyle/>
-                    <a:p>
-                      <a:r>
-                        <a:rPr sz="800">
-                          <a:solidFill>
-                            <a:srgbClr val="E2E8F0"/>
-                          </a:solidFill>
-                        </a:rPr>
-                        <a:t>D10</a:t>
-                      </a:r>
-                    </a:p>
-                  </a:txBody>
-                  <a:tcPr marL="50800" marR="50800" marT="25400" marB="25400">
-                    <a:solidFill>
-                      <a:srgbClr val="0F1424"/>
-                    </a:solidFill>
-                  </a:tcPr>
-                </a:tc>
-                <a:tc>
-                  <a:txBody>
-                    <a:bodyPr/>
-                    <a:lstStyle/>
-                    <a:p>
-                      <a:r>
-                        <a:rPr sz="800">
-                          <a:solidFill>
-                            <a:srgbClr val="E2E8F0"/>
-                          </a:solidFill>
-                        </a:rPr>
-                        <a:t>Immuta on PL shared tables</a:t>
-                      </a:r>
-                    </a:p>
-                  </a:txBody>
-                  <a:tcPr marL="50800" marR="50800" marT="25400" marB="25400">
-                    <a:solidFill>
-                      <a:srgbClr val="0F1424"/>
-                    </a:solidFill>
-                  </a:tcPr>
-                </a:tc>
-                <a:tc>
-                  <a:txBody>
-                    <a:bodyPr/>
-                    <a:lstStyle/>
-                    <a:p>
-                      <a:r>
-                        <a:rPr sz="800">
-                          <a:solidFill>
-                            <a:srgbClr val="E2E8F0"/>
-                          </a:solidFill>
-                        </a:rPr>
-                        <a:t>Validate governance (see B4)</a:t>
-                      </a:r>
-                    </a:p>
-                  </a:txBody>
-                  <a:tcPr marL="50800" marR="50800" marT="25400" marB="25400">
-                    <a:solidFill>
-                      <a:srgbClr val="0F1424"/>
-                    </a:solidFill>
-                  </a:tcPr>
-                </a:tc>
-              </a:tr>
-              <a:tr h="228600">
-                <a:tc>
-                  <a:txBody>
-                    <a:bodyPr/>
-                    <a:lstStyle/>
-                    <a:p>
-                      <a:r>
-                        <a:rPr sz="800">
-                          <a:solidFill>
-                            <a:srgbClr val="E2E8F0"/>
-                          </a:solidFill>
-                        </a:rPr>
-                        <a:t>D11</a:t>
-                      </a:r>
-                    </a:p>
-                  </a:txBody>
-                  <a:tcPr marL="50800" marR="50800" marT="25400" marB="25400">
-                    <a:solidFill>
-                      <a:srgbClr val="121728"/>
-                    </a:solidFill>
-                  </a:tcPr>
-                </a:tc>
-                <a:tc>
-                  <a:txBody>
-                    <a:bodyPr/>
-                    <a:lstStyle/>
-                    <a:p>
-                      <a:r>
-                        <a:rPr sz="800">
-                          <a:solidFill>
-                            <a:srgbClr val="E2E8F0"/>
-                          </a:solidFill>
-                        </a:rPr>
-                        <a:t>DR drill cadence</a:t>
-                      </a:r>
-                    </a:p>
-                  </a:txBody>
-                  <a:tcPr marL="50800" marR="50800" marT="25400" marB="25400">
-                    <a:solidFill>
-                      <a:srgbClr val="121728"/>
-                    </a:solidFill>
-                  </a:tcPr>
-                </a:tc>
-                <a:tc>
-                  <a:txBody>
-                    <a:bodyPr/>
-                    <a:lstStyle/>
-                    <a:p>
-                      <a:r>
-                        <a:rPr sz="800">
-                          <a:solidFill>
-                            <a:srgbClr val="E2E8F0"/>
-                          </a:solidFill>
-                        </a:rPr>
-                        <a:t>Mandatory quarterly for Tier 1 + platform</a:t>
-                      </a:r>
-                    </a:p>
-                  </a:txBody>
-                  <a:tcPr marL="50800" marR="50800" marT="25400" marB="25400">
-                    <a:solidFill>
-                      <a:srgbClr val="121728"/>
-                    </a:solidFill>
-                  </a:tcPr>
-                </a:tc>
-              </a:tr>
-            </a:tbl>
-          </a:graphicData>
-        </a:graphic>
-      </p:graphicFrame>
-      <p:sp>
-        <p:nvSpPr>
-          <p:cNvPr id="7" name="TextBox 6"/>
-          <p:cNvSpPr txBox="1"/>
-          <p:nvPr/>
-        </p:nvSpPr>
-        <p:spPr>
-          <a:xfrm>
-            <a:off x="6172200" y="868680"/>
-            <a:ext cx="4572000" cy="228600"/>
-          </a:xfrm>
-          <a:prstGeom prst="rect">
-            <a:avLst/>
-          </a:prstGeom>
-          <a:noFill/>
-        </p:spPr>
-        <p:txBody>
-          <a:bodyPr wrap="square" lIns="50800" rIns="50800" tIns="25400" bIns="25400">
-            <a:spAutoFit/>
-          </a:bodyPr>
-          <a:lstStyle/>
-          <a:p>
-            <a:pPr algn="l"/>
-            <a:r>
-              <a:rPr sz="1300" b="1">
-                <a:solidFill>
-                  <a:srgbClr val="F97066"/>
-                </a:solidFill>
-              </a:rPr>
-              <a:t>Critical Blockers</a:t>
-            </a:r>
-          </a:p>
-        </p:txBody>
-      </p:sp>
-      <p:graphicFrame>
-        <p:nvGraphicFramePr>
-          <p:cNvPr id="8" name="Table 7"/>
-          <p:cNvGraphicFramePr>
-            <a:graphicFrameLocks noGrp="1"/>
-          </p:cNvGraphicFramePr>
-          <p:nvPr/>
-        </p:nvGraphicFramePr>
-        <p:xfrm>
-          <a:off x="6172200" y="1115568"/>
-          <a:ext cx="5669280" cy="1371600"/>
-        </p:xfrm>
-        <a:graphic>
-          <a:graphicData uri="http://schemas.openxmlformats.org/drawingml/2006/table">
-            <a:tbl>
-              <a:tblPr firstRow="1" bandRow="1">
-                <a:tableStyleId>{5C22544A-7EE6-4342-B048-85BDC9FD1C3A}</a:tableStyleId>
-              </a:tblPr>
-              <a:tblGrid>
-                <a:gridCol w="320040"/>
-                <a:gridCol w="3931920"/>
-                <a:gridCol w="1417320"/>
-              </a:tblGrid>
-              <a:tr h="228600">
-                <a:tc>
-                  <a:txBody>
-                    <a:bodyPr/>
-                    <a:lstStyle/>
-                    <a:p>
-                      <a:r>
-                        <a:rPr sz="800" b="1">
-                          <a:solidFill>
-                            <a:srgbClr val="94A3B8"/>
-                          </a:solidFill>
-                        </a:rPr>
-                        <a:t>#</a:t>
-                      </a:r>
-                    </a:p>
-                  </a:txBody>
-                  <a:tcPr marL="50800" marR="50800" marT="25400" marB="25400">
-                    <a:solidFill>
-                      <a:srgbClr val="5C1818"/>
-                    </a:solidFill>
-                  </a:tcPr>
-                </a:tc>
-                <a:tc>
-                  <a:txBody>
-                    <a:bodyPr/>
-                    <a:lstStyle/>
-                    <a:p>
-                      <a:r>
-                        <a:rPr sz="800" b="1">
-                          <a:solidFill>
-                            <a:srgbClr val="94A3B8"/>
-                          </a:solidFill>
-                        </a:rPr>
-                        <a:t>Blocker</a:t>
-                      </a:r>
-                    </a:p>
-                  </a:txBody>
-                  <a:tcPr marL="50800" marR="50800" marT="25400" marB="25400">
-                    <a:solidFill>
-                      <a:srgbClr val="5C1818"/>
-                    </a:solidFill>
-                  </a:tcPr>
-                </a:tc>
-                <a:tc>
-                  <a:txBody>
-                    <a:bodyPr/>
-                    <a:lstStyle/>
-                    <a:p>
-                      <a:r>
-                        <a:rPr sz="800" b="1">
-                          <a:solidFill>
-                            <a:srgbClr val="94A3B8"/>
-                          </a:solidFill>
-                        </a:rPr>
-                        <a:t>Owner</a:t>
-                      </a:r>
-                    </a:p>
-                  </a:txBody>
-                  <a:tcPr marL="50800" marR="50800" marT="25400" marB="25400">
-                    <a:solidFill>
-                      <a:srgbClr val="5C1818"/>
-                    </a:solidFill>
-                  </a:tcPr>
-                </a:tc>
-              </a:tr>
-              <a:tr h="228600">
-                <a:tc>
-                  <a:txBody>
-                    <a:bodyPr/>
-                    <a:lstStyle/>
-                    <a:p>
-                      <a:r>
-                        <a:rPr sz="800">
-                          <a:solidFill>
-                            <a:srgbClr val="E2E8F0"/>
-                          </a:solidFill>
-                        </a:rPr>
-                        <a:t>B1</a:t>
-                      </a:r>
-                    </a:p>
-                  </a:txBody>
-                  <a:tcPr marL="50800" marR="50800" marT="25400" marB="25400">
-                    <a:solidFill>
-                      <a:srgbClr val="121728"/>
-                    </a:solidFill>
-                  </a:tcPr>
-                </a:tc>
-                <a:tc>
-                  <a:txBody>
-                    <a:bodyPr/>
-                    <a:lstStyle/>
-                    <a:p>
-                      <a:r>
-                        <a:rPr sz="800">
-                          <a:solidFill>
-                            <a:srgbClr val="E2E8F0"/>
-                          </a:solidFill>
-                        </a:rPr>
-                        <a:t>Direct Connect from west2 to on-prem — 4-8 week lead. Must start immediately.</a:t>
-                      </a:r>
-                    </a:p>
-                  </a:txBody>
-                  <a:tcPr marL="50800" marR="50800" marT="25400" marB="25400">
-                    <a:solidFill>
-                      <a:srgbClr val="121728"/>
-                    </a:solidFill>
-                  </a:tcPr>
-                </a:tc>
-                <a:tc>
-                  <a:txBody>
-                    <a:bodyPr/>
-                    <a:lstStyle/>
-                    <a:p>
-                      <a:r>
-                        <a:rPr sz="800">
-                          <a:solidFill>
-                            <a:srgbClr val="E2E8F0"/>
-                          </a:solidFill>
-                        </a:rPr>
-                        <a:t>Platform + Network</a:t>
-                      </a:r>
-                    </a:p>
-                  </a:txBody>
-                  <a:tcPr marL="50800" marR="50800" marT="25400" marB="25400">
-                    <a:solidFill>
-                      <a:srgbClr val="121728"/>
-                    </a:solidFill>
-                  </a:tcPr>
-                </a:tc>
-              </a:tr>
-              <a:tr h="228600">
-                <a:tc>
-                  <a:txBody>
-                    <a:bodyPr/>
-                    <a:lstStyle/>
-                    <a:p>
-                      <a:r>
-                        <a:rPr sz="800">
-                          <a:solidFill>
-                            <a:srgbClr val="E2E8F0"/>
-                          </a:solidFill>
-                        </a:rPr>
-                        <a:t>B2</a:t>
-                      </a:r>
-                    </a:p>
-                  </a:txBody>
-                  <a:tcPr marL="50800" marR="50800" marT="25400" marB="25400">
-                    <a:solidFill>
-                      <a:srgbClr val="0F1424"/>
-                    </a:solidFill>
-                  </a:tcPr>
-                </a:tc>
-                <a:tc>
-                  <a:txBody>
-                    <a:bodyPr/>
-                    <a:lstStyle/>
-                    <a:p>
-                      <a:r>
-                        <a:rPr sz="800">
-                          <a:solidFill>
-                            <a:srgbClr val="E2E8F0"/>
-                          </a:solidFill>
-                        </a:rPr>
-                        <a:t>Snowflake PL + Unmanaged Iceberg — BCR-1528 silently skips. Must validate with SF support.</a:t>
-                      </a:r>
-                    </a:p>
-                  </a:txBody>
-                  <a:tcPr marL="50800" marR="50800" marT="25400" marB="25400">
-                    <a:solidFill>
-                      <a:srgbClr val="0F1424"/>
-                    </a:solidFill>
-                  </a:tcPr>
-                </a:tc>
-                <a:tc>
-                  <a:txBody>
-                    <a:bodyPr/>
-                    <a:lstStyle/>
-                    <a:p>
-                      <a:r>
-                        <a:rPr sz="800">
-                          <a:solidFill>
-                            <a:srgbClr val="E2E8F0"/>
-                          </a:solidFill>
-                        </a:rPr>
-                        <a:t>Platform + Snowflake</a:t>
-                      </a:r>
-                    </a:p>
-                  </a:txBody>
-                  <a:tcPr marL="50800" marR="50800" marT="25400" marB="25400">
-                    <a:solidFill>
-                      <a:srgbClr val="0F1424"/>
-                    </a:solidFill>
-                  </a:tcPr>
-                </a:tc>
-              </a:tr>
-              <a:tr h="228600">
-                <a:tc>
-                  <a:txBody>
-                    <a:bodyPr/>
-                    <a:lstStyle/>
-                    <a:p>
-                      <a:r>
-                        <a:rPr sz="800">
-                          <a:solidFill>
-                            <a:srgbClr val="E2E8F0"/>
-                          </a:solidFill>
-                        </a:rPr>
-                        <a:t>B3</a:t>
-                      </a:r>
-                    </a:p>
-                  </a:txBody>
-                  <a:tcPr marL="50800" marR="50800" marT="25400" marB="25400">
-                    <a:solidFill>
-                      <a:srgbClr val="121728"/>
-                    </a:solidFill>
-                  </a:tcPr>
-                </a:tc>
-                <a:tc>
-                  <a:txBody>
-                    <a:bodyPr/>
-                    <a:lstStyle/>
-                    <a:p>
-                      <a:r>
-                        <a:rPr sz="800">
-                          <a:solidFill>
-                            <a:srgbClr val="E2E8F0"/>
-                          </a:solidFill>
-                        </a:rPr>
-                        <a:t>Snowflake Business Critical edition — may require contract upgrade.</a:t>
-                      </a:r>
-                    </a:p>
-                  </a:txBody>
-                  <a:tcPr marL="50800" marR="50800" marT="25400" marB="25400">
-                    <a:solidFill>
-                      <a:srgbClr val="121728"/>
-                    </a:solidFill>
-                  </a:tcPr>
-                </a:tc>
-                <a:tc>
-                  <a:txBody>
-                    <a:bodyPr/>
-                    <a:lstStyle/>
-                    <a:p>
-                      <a:r>
-                        <a:rPr sz="800">
-                          <a:solidFill>
-                            <a:srgbClr val="E2E8F0"/>
-                          </a:solidFill>
-                        </a:rPr>
-                        <a:t>Platform + Procurement</a:t>
-                      </a:r>
-                    </a:p>
-                  </a:txBody>
-                  <a:tcPr marL="50800" marR="50800" marT="25400" marB="25400">
-                    <a:solidFill>
-                      <a:srgbClr val="121728"/>
-                    </a:solidFill>
-                  </a:tcPr>
-                </a:tc>
-              </a:tr>
-              <a:tr h="228600">
-                <a:tc>
-                  <a:txBody>
-                    <a:bodyPr/>
-                    <a:lstStyle/>
-                    <a:p>
-                      <a:r>
-                        <a:rPr sz="800">
-                          <a:solidFill>
-                            <a:srgbClr val="E2E8F0"/>
-                          </a:solidFill>
-                        </a:rPr>
-                        <a:t>B4</a:t>
-                      </a:r>
-                    </a:p>
-                  </a:txBody>
-                  <a:tcPr marL="50800" marR="50800" marT="25400" marB="25400">
-                    <a:solidFill>
-                      <a:srgbClr val="0F1424"/>
-                    </a:solidFill>
-                  </a:tcPr>
-                </a:tc>
-                <a:tc>
-                  <a:txBody>
-                    <a:bodyPr/>
-                    <a:lstStyle/>
-                    <a:p>
-                      <a:r>
-                        <a:rPr sz="800">
-                          <a:solidFill>
-                            <a:srgbClr val="E2E8F0"/>
-                          </a:solidFill>
-                        </a:rPr>
-                        <a:t>Immuta on PL shared tables — untested. Must validate governance coverage.</a:t>
-                      </a:r>
-                    </a:p>
-                  </a:txBody>
-                  <a:tcPr marL="50800" marR="50800" marT="25400" marB="25400">
-                    <a:solidFill>
-                      <a:srgbClr val="0F1424"/>
-                    </a:solidFill>
-                  </a:tcPr>
-                </a:tc>
-                <a:tc>
-                  <a:txBody>
-                    <a:bodyPr/>
-                    <a:lstStyle/>
-                    <a:p>
-                      <a:r>
-                        <a:rPr sz="800">
-                          <a:solidFill>
-                            <a:srgbClr val="E2E8F0"/>
-                          </a:solidFill>
-                        </a:rPr>
-                        <a:t>Governance Team</a:t>
-                      </a:r>
-                    </a:p>
-                  </a:txBody>
-                  <a:tcPr marL="50800" marR="50800" marT="25400" marB="25400">
-                    <a:solidFill>
-                      <a:srgbClr val="0F1424"/>
-                    </a:solidFill>
-                  </a:tcPr>
-                </a:tc>
-              </a:tr>
-              <a:tr h="228600">
-                <a:tc>
-                  <a:txBody>
-                    <a:bodyPr/>
-                    <a:lstStyle/>
-                    <a:p>
-                      <a:r>
-                        <a:rPr sz="800">
-                          <a:solidFill>
-                            <a:srgbClr val="E2E8F0"/>
-                          </a:solidFill>
-                        </a:rPr>
-                        <a:t>B5</a:t>
-                      </a:r>
-                    </a:p>
-                  </a:txBody>
-                  <a:tcPr marL="50800" marR="50800" marT="25400" marB="25400">
-                    <a:solidFill>
-                      <a:srgbClr val="121728"/>
-                    </a:solidFill>
-                  </a:tcPr>
-                </a:tc>
-                <a:tc>
-                  <a:txBody>
-                    <a:bodyPr/>
-                    <a:lstStyle/>
-                    <a:p>
-                      <a:r>
-                        <a:rPr sz="800">
-                          <a:solidFill>
-                            <a:srgbClr val="E2E8F0"/>
-                          </a:solidFill>
-                        </a:rPr>
-                        <a:t>Iceberg metadata absolute paths — need register_table + path substitution automation.</a:t>
-                      </a:r>
-                    </a:p>
-                  </a:txBody>
-                  <a:tcPr marL="50800" marR="50800" marT="25400" marB="25400">
-                    <a:solidFill>
-                      <a:srgbClr val="121728"/>
-                    </a:solidFill>
-                  </a:tcPr>
-                </a:tc>
-                <a:tc>
-                  <a:txBody>
-                    <a:bodyPr/>
-                    <a:lstStyle/>
-                    <a:p>
-                      <a:r>
-                        <a:rPr sz="800">
-                          <a:solidFill>
-                            <a:srgbClr val="E2E8F0"/>
-                          </a:solidFill>
-                        </a:rPr>
-                        <a:t>Platform Team</a:t>
-                      </a:r>
-                    </a:p>
-                  </a:txBody>
-                  <a:tcPr marL="50800" marR="50800" marT="25400" marB="25400">
-                    <a:solidFill>
-                      <a:srgbClr val="121728"/>
-                    </a:solidFill>
-                  </a:tcPr>
-                </a:tc>
-              </a:tr>
-            </a:tbl>
-          </a:graphicData>
-        </a:graphic>
-      </p:graphicFrame>
-      <p:sp>
-        <p:nvSpPr>
-          <p:cNvPr id="9" name="TextBox 8"/>
-          <p:cNvSpPr txBox="1"/>
-          <p:nvPr/>
-        </p:nvSpPr>
-        <p:spPr>
-          <a:xfrm>
-            <a:off x="6172200" y="2670048"/>
-            <a:ext cx="4572000" cy="228600"/>
-          </a:xfrm>
-          <a:prstGeom prst="rect">
-            <a:avLst/>
-          </a:prstGeom>
-          <a:noFill/>
-        </p:spPr>
-        <p:txBody>
-          <a:bodyPr wrap="square" lIns="50800" rIns="50800" tIns="25400" bIns="25400">
-            <a:spAutoFit/>
-          </a:bodyPr>
-          <a:lstStyle/>
-          <a:p>
-            <a:pPr algn="l"/>
-            <a:r>
-              <a:rPr sz="1300" b="1">
-                <a:solidFill>
-                  <a:srgbClr val="FFFFFF"/>
-                </a:solidFill>
-              </a:rPr>
-              <a:t>Estimated Warm Standby Cost</a:t>
-            </a:r>
-          </a:p>
-        </p:txBody>
-      </p:sp>
-      <p:graphicFrame>
-        <p:nvGraphicFramePr>
-          <p:cNvPr id="10" name="Table 9"/>
-          <p:cNvGraphicFramePr>
-            <a:graphicFrameLocks noGrp="1"/>
-          </p:cNvGraphicFramePr>
-          <p:nvPr/>
-        </p:nvGraphicFramePr>
-        <p:xfrm>
-          <a:off x="6172200" y="2926080"/>
-          <a:ext cx="5669280" cy="1828800"/>
-        </p:xfrm>
-        <a:graphic>
-          <a:graphicData uri="http://schemas.openxmlformats.org/drawingml/2006/table">
-            <a:tbl>
-              <a:tblPr firstRow="1" bandRow="1">
-                <a:tableStyleId>{5C22544A-7EE6-4342-B048-85BDC9FD1C3A}</a:tableStyleId>
-              </a:tblPr>
-              <a:tblGrid>
-                <a:gridCol w="2377440"/>
-                <a:gridCol w="3291840"/>
-              </a:tblGrid>
-              <a:tr h="228600">
-                <a:tc>
-                  <a:txBody>
-                    <a:bodyPr/>
-                    <a:lstStyle/>
-                    <a:p>
-                      <a:r>
-                        <a:rPr sz="800" b="1">
-                          <a:solidFill>
-                            <a:srgbClr val="94A3B8"/>
-                          </a:solidFill>
-                        </a:rPr>
-                        <a:t>Component</a:t>
-                      </a:r>
-                    </a:p>
-                  </a:txBody>
-                  <a:tcPr marL="50800" marR="50800" marT="25400" marB="25400">
-                    <a:solidFill>
-                      <a:srgbClr val="151B2E"/>
-                    </a:solidFill>
-                  </a:tcPr>
-                </a:tc>
-                <a:tc>
-                  <a:txBody>
-                    <a:bodyPr/>
-                    <a:lstStyle/>
-                    <a:p>
-                      <a:r>
-                        <a:rPr sz="800" b="1">
-                          <a:solidFill>
-                            <a:srgbClr val="94A3B8"/>
-                          </a:solidFill>
-                        </a:rPr>
-                        <a:t>Monthly Cost</a:t>
-                      </a:r>
-                    </a:p>
-                  </a:txBody>
-                  <a:tcPr marL="50800" marR="50800" marT="25400" marB="25400">
-                    <a:solidFill>
-                      <a:srgbClr val="151B2E"/>
-                    </a:solidFill>
-                  </a:tcPr>
-                </a:tc>
-              </a:tr>
-              <a:tr h="228600">
-                <a:tc>
-                  <a:txBody>
-                    <a:bodyPr/>
-                    <a:lstStyle/>
-                    <a:p>
-                      <a:r>
-                        <a:rPr sz="800">
-                          <a:solidFill>
-                            <a:srgbClr val="E2E8F0"/>
-                          </a:solidFill>
-                        </a:rPr>
-                        <a:t>S3 CRR Storage + Transfer</a:t>
-                      </a:r>
-                    </a:p>
-                  </a:txBody>
-                  <a:tcPr marL="50800" marR="50800" marT="25400" marB="25400">
-                    <a:solidFill>
-                      <a:srgbClr val="121728"/>
-                    </a:solidFill>
-                  </a:tcPr>
-                </a:tc>
-                <a:tc>
-                  <a:txBody>
-                    <a:bodyPr/>
-                    <a:lstStyle/>
-                    <a:p>
-                      <a:r>
-                        <a:rPr sz="800">
-                          <a:solidFill>
-                            <a:srgbClr val="E2E8F0"/>
-                          </a:solidFill>
-                        </a:rPr>
-                        <a:t>$0.02/GB transfer + storage duplication</a:t>
-                      </a:r>
-                    </a:p>
-                  </a:txBody>
-                  <a:tcPr marL="50800" marR="50800" marT="25400" marB="25400">
-                    <a:solidFill>
-                      <a:srgbClr val="121728"/>
-                    </a:solidFill>
-                  </a:tcPr>
-                </a:tc>
-              </a:tr>
-              <a:tr h="228600">
-                <a:tc>
-                  <a:txBody>
-                    <a:bodyPr/>
-                    <a:lstStyle/>
-                    <a:p>
-                      <a:r>
-                        <a:rPr sz="800">
-                          <a:solidFill>
-                            <a:srgbClr val="E2E8F0"/>
-                          </a:solidFill>
-                        </a:rPr>
-                        <a:t>DynamoDB Global Tables</a:t>
-                      </a:r>
-                    </a:p>
-                  </a:txBody>
-                  <a:tcPr marL="50800" marR="50800" marT="25400" marB="25400">
-                    <a:solidFill>
-                      <a:srgbClr val="0F1424"/>
-                    </a:solidFill>
-                  </a:tcPr>
-                </a:tc>
-                <a:tc>
-                  <a:txBody>
-                    <a:bodyPr/>
-                    <a:lstStyle/>
-                    <a:p>
-                      <a:r>
-                        <a:rPr sz="800">
-                          <a:solidFill>
-                            <a:srgbClr val="E2E8F0"/>
-                          </a:solidFill>
-                        </a:rPr>
-                        <a:t>~2x write costs</a:t>
-                      </a:r>
-                    </a:p>
-                  </a:txBody>
-                  <a:tcPr marL="50800" marR="50800" marT="25400" marB="25400">
-                    <a:solidFill>
-                      <a:srgbClr val="0F1424"/>
-                    </a:solidFill>
-                  </a:tcPr>
-                </a:tc>
-              </a:tr>
-              <a:tr h="228600">
-                <a:tc>
-                  <a:txBody>
-                    <a:bodyPr/>
-                    <a:lstStyle/>
-                    <a:p>
-                      <a:r>
-                        <a:rPr sz="800">
-                          <a:solidFill>
-                            <a:srgbClr val="E2E8F0"/>
-                          </a:solidFill>
-                        </a:rPr>
-                        <a:t>ECS Warm Standby</a:t>
-                      </a:r>
-                    </a:p>
-                  </a:txBody>
-                  <a:tcPr marL="50800" marR="50800" marT="25400" marB="25400">
-                    <a:solidFill>
-                      <a:srgbClr val="121728"/>
-                    </a:solidFill>
-                  </a:tcPr>
-                </a:tc>
-                <a:tc>
-                  <a:txBody>
-                    <a:bodyPr/>
-                    <a:lstStyle/>
-                    <a:p>
-                      <a:r>
-                        <a:rPr sz="800">
-                          <a:solidFill>
-                            <a:srgbClr val="E2E8F0"/>
-                          </a:solidFill>
-                        </a:rPr>
-                        <a:t>~20% of primary</a:t>
-                      </a:r>
-                    </a:p>
-                  </a:txBody>
-                  <a:tcPr marL="50800" marR="50800" marT="25400" marB="25400">
-                    <a:solidFill>
-                      <a:srgbClr val="121728"/>
-                    </a:solidFill>
-                  </a:tcPr>
-                </a:tc>
-              </a:tr>
-              <a:tr h="228600">
-                <a:tc>
-                  <a:txBody>
-                    <a:bodyPr/>
-                    <a:lstStyle/>
-                    <a:p>
-                      <a:r>
-                        <a:rPr sz="800">
-                          <a:solidFill>
-                            <a:srgbClr val="E2E8F0"/>
-                          </a:solidFill>
-                        </a:rPr>
-                        <a:t>Starburst Warm Standby</a:t>
-                      </a:r>
-                    </a:p>
-                  </a:txBody>
-                  <a:tcPr marL="50800" marR="50800" marT="25400" marB="25400">
-                    <a:solidFill>
-                      <a:srgbClr val="0F1424"/>
-                    </a:solidFill>
-                  </a:tcPr>
-                </a:tc>
-                <a:tc>
-                  <a:txBody>
-                    <a:bodyPr/>
-                    <a:lstStyle/>
-                    <a:p>
-                      <a:r>
-                        <a:rPr sz="800">
-                          <a:solidFill>
-                            <a:srgbClr val="E2E8F0"/>
-                          </a:solidFill>
-                        </a:rPr>
-                        <a:t>~15-20% of primary</a:t>
-                      </a:r>
-                    </a:p>
-                  </a:txBody>
-                  <a:tcPr marL="50800" marR="50800" marT="25400" marB="25400">
-                    <a:solidFill>
-                      <a:srgbClr val="0F1424"/>
-                    </a:solidFill>
-                  </a:tcPr>
-                </a:tc>
-              </a:tr>
-              <a:tr h="228600">
-                <a:tc>
-                  <a:txBody>
-                    <a:bodyPr/>
-                    <a:lstStyle/>
-                    <a:p>
-                      <a:r>
-                        <a:rPr sz="800">
-                          <a:solidFill>
-                            <a:srgbClr val="E2E8F0"/>
-                          </a:solidFill>
-                        </a:rPr>
-                        <a:t>Snowflake / Databricks</a:t>
-                      </a:r>
-                    </a:p>
-                  </a:txBody>
-                  <a:tcPr marL="50800" marR="50800" marT="25400" marB="25400">
-                    <a:solidFill>
-                      <a:srgbClr val="121728"/>
-                    </a:solidFill>
-                  </a:tcPr>
-                </a:tc>
-                <a:tc>
-                  <a:txBody>
-                    <a:bodyPr/>
-                    <a:lstStyle/>
-                    <a:p>
-                      <a:r>
-                        <a:rPr sz="800">
-                          <a:solidFill>
-                            <a:srgbClr val="E2E8F0"/>
-                          </a:solidFill>
-                        </a:rPr>
-                        <a:t>Minimal (warehouses suspended)</a:t>
-                      </a:r>
-                    </a:p>
-                  </a:txBody>
-                  <a:tcPr marL="50800" marR="50800" marT="25400" marB="25400">
-                    <a:solidFill>
-                      <a:srgbClr val="121728"/>
-                    </a:solidFill>
-                  </a:tcPr>
-                </a:tc>
-              </a:tr>
-              <a:tr h="228600">
-                <a:tc>
-                  <a:txBody>
-                    <a:bodyPr/>
-                    <a:lstStyle/>
-                    <a:p>
-                      <a:r>
-                        <a:rPr sz="800">
-                          <a:solidFill>
-                            <a:srgbClr val="E2E8F0"/>
-                          </a:solidFill>
-                        </a:rPr>
-                        <a:t>Immuta</a:t>
-                      </a:r>
-                    </a:p>
-                  </a:txBody>
-                  <a:tcPr marL="50800" marR="50800" marT="25400" marB="25400">
-                    <a:solidFill>
-                      <a:srgbClr val="0F1424"/>
-                    </a:solidFill>
-                  </a:tcPr>
-                </a:tc>
-                <a:tc>
-                  <a:txBody>
-                    <a:bodyPr/>
-                    <a:lstStyle/>
-                    <a:p>
-                      <a:r>
-                        <a:rPr sz="800">
-                          <a:solidFill>
-                            <a:srgbClr val="E2E8F0"/>
-                          </a:solidFill>
-                        </a:rPr>
-                        <a:t>TBD with vendor (may need add'l license)</a:t>
-                      </a:r>
-                    </a:p>
-                  </a:txBody>
-                  <a:tcPr marL="50800" marR="50800" marT="25400" marB="25400">
-                    <a:solidFill>
-                      <a:srgbClr val="0F1424"/>
-                    </a:solidFill>
-                  </a:tcPr>
-                </a:tc>
-              </a:tr>
-              <a:tr h="228600">
-                <a:tc>
-                  <a:txBody>
-                    <a:bodyPr/>
-                    <a:lstStyle/>
-                    <a:p>
-                      <a:r>
-                        <a:rPr sz="800">
-                          <a:solidFill>
-                            <a:srgbClr val="E2E8F0"/>
-                          </a:solidFill>
-                        </a:rPr>
-                        <a:t>Estimated Total</a:t>
-                      </a:r>
-                    </a:p>
-                  </a:txBody>
-                  <a:tcPr marL="50800" marR="50800" marT="25400" marB="25400">
-                    <a:solidFill>
-                      <a:srgbClr val="121728"/>
-                    </a:solidFill>
-                  </a:tcPr>
-                </a:tc>
-                <a:tc>
-                  <a:txBody>
-                    <a:bodyPr/>
-                    <a:lstStyle/>
-                    <a:p>
-                      <a:r>
-                        <a:rPr sz="800">
-                          <a:solidFill>
-                            <a:srgbClr val="E2E8F0"/>
-                          </a:solidFill>
-                        </a:rPr>
-                        <a:t>~25-35% of primary region cost</a:t>
-                      </a:r>
-                    </a:p>
-                  </a:txBody>
-                  <a:tcPr marL="50800" marR="50800" marT="25400" marB="25400">
-                    <a:solidFill>
-                      <a:srgbClr val="121728"/>
-                    </a:solidFill>
-                  </a:tcPr>
-                </a:tc>
-              </a:tr>
-            </a:tbl>
-          </a:graphicData>
-        </a:graphic>
-      </p:graphicFrame>
-      <p:sp>
-        <p:nvSpPr>
-          <p:cNvPr id="11" name="TextBox 10"/>
-          <p:cNvSpPr txBox="1"/>
-          <p:nvPr/>
-        </p:nvSpPr>
-        <p:spPr>
-          <a:xfrm>
-            <a:off x="274320" y="5074920"/>
-            <a:ext cx="4572000" cy="228600"/>
-          </a:xfrm>
-          <a:prstGeom prst="rect">
-            <a:avLst/>
-          </a:prstGeom>
-          <a:noFill/>
-        </p:spPr>
-        <p:txBody>
-          <a:bodyPr wrap="square" lIns="50800" rIns="50800" tIns="25400" bIns="25400">
-            <a:spAutoFit/>
-          </a:bodyPr>
-          <a:lstStyle/>
-          <a:p>
-            <a:pPr algn="l"/>
-            <a:r>
-              <a:rPr sz="1300" b="1">
-                <a:solidFill>
-                  <a:srgbClr val="FFFFFF"/>
-                </a:solidFill>
-              </a:rPr>
-              <a:t>Implementation Timeline</a:t>
-            </a:r>
-          </a:p>
-        </p:txBody>
-      </p:sp>
-      <p:sp>
-        <p:nvSpPr>
-          <p:cNvPr id="12" name="Rounded Rectangle 11"/>
-          <p:cNvSpPr/>
-          <p:nvPr/>
-        </p:nvSpPr>
-        <p:spPr>
-          <a:xfrm>
-            <a:off x="274320" y="5349240"/>
-            <a:ext cx="2240280" cy="1005840"/>
-          </a:xfrm>
-          <a:prstGeom prst="roundRect">
-            <a:avLst/>
-          </a:prstGeom>
           <a:solidFill>
-            <a:srgbClr val="1A2138"/>
+            <a:srgbClr val="1D8102"/>
           </a:solidFill>
-          <a:ln w="12700">
-            <a:solidFill>
-              <a:srgbClr val="2A3560"/>
-            </a:solidFill>
+          <a:ln>
+            <a:noFill/>
           </a:ln>
         </p:spPr>
         <p:style>
@@ -20455,76 +18821,102 @@
           </a:fontRef>
         </p:style>
         <p:txBody>
-          <a:bodyPr rtlCol="0" anchor="ctr" wrap="square" lIns="76200" rIns="76200" tIns="50800" bIns="50800"/>
+          <a:bodyPr rtlCol="0" anchor="ctr"/>
           <a:lstStyle/>
           <a:p>
             <a:pPr algn="ctr"/>
-            <a:r>
-              <a:rPr sz="800">
-                <a:solidFill>
-                  <a:srgbClr val="64748B"/>
-                </a:solidFill>
-              </a:rPr>
-              <a:t>PHASE 1</a:t>
-            </a:r>
-          </a:p>
-          <a:p>
-            <a:pPr algn="ctr"/>
-            <a:r>
-              <a:rPr sz="1100" b="1">
+          </a:p>
+        </p:txBody>
+      </p:sp>
+      <p:sp>
+        <p:nvSpPr>
+          <p:cNvPr id="10" name="TextBox 9"/>
+          <p:cNvSpPr txBox="1"/>
+          <p:nvPr/>
+        </p:nvSpPr>
+        <p:spPr>
+          <a:xfrm>
+            <a:off x="4760000" y="980000"/>
+            <a:ext cx="3100000" cy="250000"/>
+          </a:xfrm>
+          <a:prstGeom prst="rect">
+            <a:avLst/>
+          </a:prstGeom>
+          <a:noFill/>
+        </p:spPr>
+        <p:txBody>
+          <a:bodyPr wrap="square">
+            <a:spAutoFit/>
+          </a:bodyPr>
+          <a:lstStyle/>
+          <a:p>
+            <a:pPr>
+              <a:defRPr sz="1600" b="1">
                 <a:solidFill>
                   <a:srgbClr val="FFFFFF"/>
                 </a:solidFill>
-              </a:rPr>
-              <a:t>Foundation</a:t>
-            </a:r>
-          </a:p>
-          <a:p>
-            <a:pPr algn="ctr"/>
-            <a:r>
-              <a:rPr sz="800">
-                <a:solidFill>
-                  <a:srgbClr val="94A3B8"/>
-                </a:solidFill>
-              </a:rPr>
-              <a:t>Weeks 1-4</a:t>
-            </a:r>
-          </a:p>
-          <a:p>
-            <a:pPr algn="ctr"/>
-            <a:r>
-              <a:rPr sz="700">
-                <a:solidFill>
-                  <a:srgbClr val="64748B"/>
-                </a:solidFill>
-              </a:rPr>
-              <a:t>VPC, DDB, DX order,
-SF/SB/DBX provision</a:t>
-            </a:r>
-          </a:p>
-        </p:txBody>
-      </p:sp>
-      <p:sp>
-        <p:nvSpPr>
-          <p:cNvPr id="13" name="Rounded Rectangle 12"/>
+              </a:defRPr>
+            </a:pPr>
+            <a:r>
+              <a:t>Producer Tasks</a:t>
+            </a:r>
+          </a:p>
+        </p:txBody>
+      </p:sp>
+      <p:sp>
+        <p:nvSpPr>
+          <p:cNvPr id="11" name="TextBox 10"/>
+          <p:cNvSpPr txBox="1"/>
+          <p:nvPr/>
+        </p:nvSpPr>
+        <p:spPr>
+          <a:xfrm>
+            <a:off x="4760000" y="1220000"/>
+            <a:ext cx="3100000" cy="200000"/>
+          </a:xfrm>
+          <a:prstGeom prst="rect">
+            <a:avLst/>
+          </a:prstGeom>
+          <a:noFill/>
+        </p:spPr>
+        <p:txBody>
+          <a:bodyPr wrap="none">
+            <a:spAutoFit/>
+          </a:bodyPr>
+          <a:lstStyle/>
+          <a:p>
+            <a:pPr>
+              <a:defRPr sz="1000">
+                <a:solidFill>
+                  <a:srgbClr val="CCCCCC"/>
+                </a:solidFill>
+              </a:defRPr>
+            </a:pPr>
+            <a:r>
+              <a:t>Data Producer Teams</a:t>
+            </a:r>
+          </a:p>
+        </p:txBody>
+      </p:sp>
+      <p:sp>
+        <p:nvSpPr>
+          <p:cNvPr id="12" name="Rectangle 11"/>
           <p:cNvSpPr/>
           <p:nvPr/>
         </p:nvSpPr>
         <p:spPr>
           <a:xfrm>
-            <a:off x="2624328" y="5349240"/>
-            <a:ext cx="2240280" cy="1005840"/>
-          </a:xfrm>
-          <a:prstGeom prst="roundRect">
+            <a:off x="8080000" y="900000"/>
+            <a:ext cx="3300000" cy="520000"/>
+          </a:xfrm>
+          <a:prstGeom prst="rect">
             <a:avLst/>
           </a:prstGeom>
           <a:solidFill>
-            <a:srgbClr val="1E3A5F"/>
+            <a:srgbClr val="0073BB"/>
           </a:solidFill>
-          <a:ln w="12700">
-            <a:solidFill>
-              <a:srgbClr val="2A3560"/>
-            </a:solidFill>
+          <a:ln>
+            <a:noFill/>
           </a:ln>
         </p:spPr>
         <p:style>
@@ -20542,75 +18934,103 @@
           </a:fontRef>
         </p:style>
         <p:txBody>
-          <a:bodyPr rtlCol="0" anchor="ctr" wrap="square" lIns="76200" rIns="76200" tIns="50800" bIns="50800"/>
+          <a:bodyPr rtlCol="0" anchor="ctr"/>
           <a:lstStyle/>
           <a:p>
             <a:pPr algn="ctr"/>
-            <a:r>
-              <a:rPr sz="800">
-                <a:solidFill>
-                  <a:srgbClr val="64748B"/>
-                </a:solidFill>
-              </a:rPr>
-              <a:t>PHASE 2</a:t>
-            </a:r>
-          </a:p>
-          <a:p>
-            <a:pPr algn="ctr"/>
-            <a:r>
-              <a:rPr sz="1100" b="1">
+          </a:p>
+        </p:txBody>
+      </p:sp>
+      <p:sp>
+        <p:nvSpPr>
+          <p:cNvPr id="13" name="TextBox 12"/>
+          <p:cNvSpPr txBox="1"/>
+          <p:nvPr/>
+        </p:nvSpPr>
+        <p:spPr>
+          <a:xfrm>
+            <a:off x="8200000" y="980000"/>
+            <a:ext cx="3100000" cy="250000"/>
+          </a:xfrm>
+          <a:prstGeom prst="rect">
+            <a:avLst/>
+          </a:prstGeom>
+          <a:noFill/>
+        </p:spPr>
+        <p:txBody>
+          <a:bodyPr wrap="square">
+            <a:spAutoFit/>
+          </a:bodyPr>
+          <a:lstStyle/>
+          <a:p>
+            <a:pPr>
+              <a:defRPr sz="1600" b="1">
                 <a:solidFill>
                   <a:srgbClr val="FFFFFF"/>
                 </a:solidFill>
-              </a:rPr>
-              <a:t>Platform Deploy</a:t>
-            </a:r>
-          </a:p>
-          <a:p>
-            <a:pPr algn="ctr"/>
-            <a:r>
-              <a:rPr sz="800">
-                <a:solidFill>
-                  <a:srgbClr val="94A3B8"/>
-                </a:solidFill>
-              </a:rPr>
-              <a:t>Weeks 5-8</a:t>
-            </a:r>
-          </a:p>
-          <a:p>
-            <a:pPr algn="ctr"/>
-            <a:r>
-              <a:rPr sz="700">
-                <a:solidFill>
-                  <a:srgbClr val="64748B"/>
-                </a:solidFill>
-              </a:rPr>
-              <a:t>APIs, SNS, Glue,
-dual-write, dual-pub</a:t>
-            </a:r>
-          </a:p>
-        </p:txBody>
-      </p:sp>
-      <p:sp>
-        <p:nvSpPr>
-          <p:cNvPr id="14" name="Rounded Rectangle 13"/>
+              </a:defRPr>
+            </a:pPr>
+            <a:r>
+              <a:t>Consumer Tasks</a:t>
+            </a:r>
+          </a:p>
+        </p:txBody>
+      </p:sp>
+      <p:sp>
+        <p:nvSpPr>
+          <p:cNvPr id="14" name="TextBox 13"/>
+          <p:cNvSpPr txBox="1"/>
+          <p:nvPr/>
+        </p:nvSpPr>
+        <p:spPr>
+          <a:xfrm>
+            <a:off x="8200000" y="1220000"/>
+            <a:ext cx="3100000" cy="200000"/>
+          </a:xfrm>
+          <a:prstGeom prst="rect">
+            <a:avLst/>
+          </a:prstGeom>
+          <a:noFill/>
+        </p:spPr>
+        <p:txBody>
+          <a:bodyPr wrap="none">
+            <a:spAutoFit/>
+          </a:bodyPr>
+          <a:lstStyle/>
+          <a:p>
+            <a:pPr>
+              <a:defRPr sz="1000">
+                <a:solidFill>
+                  <a:srgbClr val="CCCCCC"/>
+                </a:solidFill>
+              </a:defRPr>
+            </a:pPr>
+            <a:r>
+              <a:t>Data Consumer Teams</a:t>
+            </a:r>
+          </a:p>
+        </p:txBody>
+      </p:sp>
+      <p:sp>
+        <p:nvSpPr>
+          <p:cNvPr id="15" name="Rectangle 14"/>
           <p:cNvSpPr/>
           <p:nvPr/>
         </p:nvSpPr>
         <p:spPr>
           <a:xfrm>
-            <a:off x="4974336" y="5349240"/>
-            <a:ext cx="2240280" cy="1005840"/>
-          </a:xfrm>
-          <a:prstGeom prst="roundRect">
+            <a:off x="300000" y="1500000"/>
+            <a:ext cx="4200000" cy="480000"/>
+          </a:xfrm>
+          <a:prstGeom prst="rect">
             <a:avLst/>
           </a:prstGeom>
           <a:solidFill>
-            <a:srgbClr val="3B2D6B"/>
+            <a:srgbClr val="F0F3FF"/>
           </a:solidFill>
-          <a:ln w="12700">
+          <a:ln w="6350">
             <a:solidFill>
-              <a:srgbClr val="2A3560"/>
+              <a:srgbClr val="D5DBDB"/>
             </a:solidFill>
           </a:ln>
         </p:spPr>
@@ -20629,76 +19049,32 @@
           </a:fontRef>
         </p:style>
         <p:txBody>
-          <a:bodyPr rtlCol="0" anchor="ctr" wrap="square" lIns="76200" rIns="76200" tIns="50800" bIns="50800"/>
+          <a:bodyPr rtlCol="0" anchor="ctr"/>
           <a:lstStyle/>
           <a:p>
             <a:pPr algn="ctr"/>
-            <a:r>
-              <a:rPr sz="800">
-                <a:solidFill>
-                  <a:srgbClr val="64748B"/>
-                </a:solidFill>
-              </a:rPr>
-              <a:t>PHASE 3</a:t>
-            </a:r>
-          </a:p>
-          <a:p>
-            <a:pPr algn="ctr"/>
-            <a:r>
-              <a:rPr sz="1100" b="1">
-                <a:solidFill>
-                  <a:srgbClr val="FFFFFF"/>
-                </a:solidFill>
-              </a:rPr>
-              <a:t>Producer Onboard</a:t>
-            </a:r>
-          </a:p>
-          <a:p>
-            <a:pPr algn="ctr"/>
-            <a:r>
-              <a:rPr sz="800">
-                <a:solidFill>
-                  <a:srgbClr val="94A3B8"/>
-                </a:solidFill>
-              </a:rPr>
-              <a:t>Weeks 9-16</a:t>
-            </a:r>
-          </a:p>
-          <a:p>
-            <a:pPr algn="ctr"/>
-            <a:r>
-              <a:rPr sz="700">
-                <a:solidFill>
-                  <a:srgbClr val="64748B"/>
-                </a:solidFill>
-              </a:rPr>
-              <a:t>Tier 1 first, CRR,
-IAM, Access Points</a:t>
-            </a:r>
-          </a:p>
-        </p:txBody>
-      </p:sp>
-      <p:sp>
-        <p:nvSpPr>
-          <p:cNvPr id="15" name="Rounded Rectangle 14"/>
+          </a:p>
+        </p:txBody>
+      </p:sp>
+      <p:sp>
+        <p:nvSpPr>
+          <p:cNvPr id="16" name="Rectangle 15"/>
           <p:cNvSpPr/>
           <p:nvPr/>
         </p:nvSpPr>
         <p:spPr>
           <a:xfrm>
-            <a:off x="7324344" y="5349240"/>
-            <a:ext cx="2240280" cy="1005840"/>
-          </a:xfrm>
-          <a:prstGeom prst="roundRect">
+            <a:off x="380000" y="1600000"/>
+            <a:ext cx="260000" cy="260000"/>
+          </a:xfrm>
+          <a:prstGeom prst="rect">
             <a:avLst/>
           </a:prstGeom>
           <a:solidFill>
-            <a:srgbClr val="5C2244"/>
+            <a:srgbClr val="4053D6"/>
           </a:solidFill>
-          <a:ln w="12700">
-            <a:solidFill>
-              <a:srgbClr val="2A3560"/>
-            </a:solidFill>
+          <a:ln>
+            <a:noFill/>
           </a:ln>
         </p:spPr>
         <p:style>
@@ -20716,75 +19092,115 @@
           </a:fontRef>
         </p:style>
         <p:txBody>
-          <a:bodyPr rtlCol="0" anchor="ctr" wrap="square" lIns="76200" rIns="76200" tIns="50800" bIns="50800"/>
-          <a:lstStyle/>
-          <a:p>
-            <a:pPr algn="ctr"/>
-            <a:r>
-              <a:rPr sz="800">
-                <a:solidFill>
-                  <a:srgbClr val="64748B"/>
-                </a:solidFill>
-              </a:rPr>
-              <a:t>PHASE 4</a:t>
-            </a:r>
-          </a:p>
-          <a:p>
-            <a:pPr algn="ctr"/>
-            <a:r>
-              <a:rPr sz="1100" b="1">
+          <a:bodyPr rtlCol="0" anchor="ctr" wrap="none"/>
+          <a:lstStyle/>
+          <a:p>
+            <a:pPr algn="ctr">
+              <a:spcBef>
+                <a:spcPts val="200"/>
+              </a:spcBef>
+              <a:defRPr sz="1200" b="1">
                 <a:solidFill>
                   <a:srgbClr val="FFFFFF"/>
                 </a:solidFill>
-              </a:rPr>
-              <a:t>Consumer Ready</a:t>
-            </a:r>
-          </a:p>
-          <a:p>
-            <a:pPr algn="ctr"/>
-            <a:r>
-              <a:rPr sz="800">
-                <a:solidFill>
-                  <a:srgbClr val="94A3B8"/>
-                </a:solidFill>
-              </a:rPr>
-              <a:t>Weeks 13-18</a:t>
-            </a:r>
-          </a:p>
-          <a:p>
-            <a:pPr algn="ctr"/>
-            <a:r>
-              <a:rPr sz="700">
-                <a:solidFill>
-                  <a:srgbClr val="64748B"/>
-                </a:solidFill>
-              </a:rPr>
-              <a:t>SQS, CNAME, test
-end-to-end in west2</a:t>
-            </a:r>
-          </a:p>
-        </p:txBody>
-      </p:sp>
-      <p:sp>
-        <p:nvSpPr>
-          <p:cNvPr id="16" name="Rounded Rectangle 15"/>
+              </a:defRPr>
+            </a:pPr>
+            <a:r>
+              <a:t>1</a:t>
+            </a:r>
+          </a:p>
+        </p:txBody>
+      </p:sp>
+      <p:sp>
+        <p:nvSpPr>
+          <p:cNvPr id="17" name="TextBox 16"/>
+          <p:cNvSpPr txBox="1"/>
+          <p:nvPr/>
+        </p:nvSpPr>
+        <p:spPr>
+          <a:xfrm>
+            <a:off x="720000" y="1560000"/>
+            <a:ext cx="3700000" cy="200000"/>
+          </a:xfrm>
+          <a:prstGeom prst="rect">
+            <a:avLst/>
+          </a:prstGeom>
+          <a:noFill/>
+        </p:spPr>
+        <p:txBody>
+          <a:bodyPr wrap="square">
+            <a:spAutoFit/>
+          </a:bodyPr>
+          <a:lstStyle/>
+          <a:p>
+            <a:pPr>
+              <a:defRPr sz="1100" b="1">
+                <a:solidFill>
+                  <a:srgbClr val="16191F"/>
+                </a:solidFill>
+              </a:defRPr>
+            </a:pPr>
+            <a:r>
+              <a:t>Setup Starburst on US-WEST-2</a:t>
+            </a:r>
+          </a:p>
+        </p:txBody>
+      </p:sp>
+      <p:sp>
+        <p:nvSpPr>
+          <p:cNvPr id="18" name="TextBox 17"/>
+          <p:cNvSpPr txBox="1"/>
+          <p:nvPr/>
+        </p:nvSpPr>
+        <p:spPr>
+          <a:xfrm>
+            <a:off x="720000" y="1760000"/>
+            <a:ext cx="3700000" cy="200000"/>
+          </a:xfrm>
+          <a:prstGeom prst="rect">
+            <a:avLst/>
+          </a:prstGeom>
+          <a:noFill/>
+        </p:spPr>
+        <p:txBody>
+          <a:bodyPr wrap="square">
+            <a:spAutoFit/>
+          </a:bodyPr>
+          <a:lstStyle/>
+          <a:p>
+            <a:pPr>
+              <a:defRPr sz="900">
+                <a:solidFill>
+                  <a:srgbClr val="545B64"/>
+                </a:solidFill>
+              </a:defRPr>
+            </a:pPr>
+            <a:r>
+              <a:t>Provision and configure Starburst cluster in the secondary region</a:t>
+            </a:r>
+          </a:p>
+        </p:txBody>
+      </p:sp>
+      <p:sp>
+        <p:nvSpPr>
+          <p:cNvPr id="19" name="Rectangle 18"/>
           <p:cNvSpPr/>
           <p:nvPr/>
         </p:nvSpPr>
         <p:spPr>
           <a:xfrm>
-            <a:off x="9674352" y="5349240"/>
-            <a:ext cx="2240280" cy="1005840"/>
-          </a:xfrm>
-          <a:prstGeom prst="roundRect">
+            <a:off x="300000" y="2030000"/>
+            <a:ext cx="4200000" cy="480000"/>
+          </a:xfrm>
+          <a:prstGeom prst="rect">
             <a:avLst/>
           </a:prstGeom>
           <a:solidFill>
-            <a:srgbClr val="5C4A14"/>
+            <a:srgbClr val="F0F3FF"/>
           </a:solidFill>
-          <a:ln w="12700">
+          <a:ln w="6350">
             <a:solidFill>
-              <a:srgbClr val="2A3560"/>
+              <a:srgbClr val="D5DBDB"/>
             </a:solidFill>
           </a:ln>
         </p:spPr>
@@ -20803,51 +19219,2514 @@
           </a:fontRef>
         </p:style>
         <p:txBody>
-          <a:bodyPr rtlCol="0" anchor="ctr" wrap="square" lIns="76200" rIns="76200" tIns="50800" bIns="50800"/>
+          <a:bodyPr rtlCol="0" anchor="ctr"/>
           <a:lstStyle/>
           <a:p>
             <a:pPr algn="ctr"/>
-            <a:r>
-              <a:rPr sz="800">
-                <a:solidFill>
-                  <a:srgbClr val="64748B"/>
-                </a:solidFill>
-              </a:rPr>
-              <a:t>PHASE 5</a:t>
-            </a:r>
-          </a:p>
+          </a:p>
+        </p:txBody>
+      </p:sp>
+      <p:sp>
+        <p:nvSpPr>
+          <p:cNvPr id="20" name="Rectangle 19"/>
+          <p:cNvSpPr/>
+          <p:nvPr/>
+        </p:nvSpPr>
+        <p:spPr>
+          <a:xfrm>
+            <a:off x="380000" y="2130000"/>
+            <a:ext cx="260000" cy="260000"/>
+          </a:xfrm>
+          <a:prstGeom prst="rect">
+            <a:avLst/>
+          </a:prstGeom>
+          <a:solidFill>
+            <a:srgbClr val="4053D6"/>
+          </a:solidFill>
+          <a:ln>
+            <a:noFill/>
+          </a:ln>
+        </p:spPr>
+        <p:style>
+          <a:lnRef idx="1">
+            <a:schemeClr val="accent1"/>
+          </a:lnRef>
+          <a:fillRef idx="3">
+            <a:schemeClr val="accent1"/>
+          </a:fillRef>
+          <a:effectRef idx="2">
+            <a:schemeClr val="accent1"/>
+          </a:effectRef>
+          <a:fontRef idx="minor">
+            <a:schemeClr val="lt1"/>
+          </a:fontRef>
+        </p:style>
+        <p:txBody>
+          <a:bodyPr rtlCol="0" anchor="ctr" wrap="none"/>
+          <a:lstStyle/>
+          <a:p>
+            <a:pPr algn="ctr">
+              <a:spcBef>
+                <a:spcPts val="200"/>
+              </a:spcBef>
+              <a:defRPr sz="1200" b="1">
+                <a:solidFill>
+                  <a:srgbClr val="FFFFFF"/>
+                </a:solidFill>
+              </a:defRPr>
+            </a:pPr>
+            <a:r>
+              <a:t>2</a:t>
+            </a:r>
+          </a:p>
+        </p:txBody>
+      </p:sp>
+      <p:sp>
+        <p:nvSpPr>
+          <p:cNvPr id="21" name="TextBox 20"/>
+          <p:cNvSpPr txBox="1"/>
+          <p:nvPr/>
+        </p:nvSpPr>
+        <p:spPr>
+          <a:xfrm>
+            <a:off x="720000" y="2090000"/>
+            <a:ext cx="3700000" cy="200000"/>
+          </a:xfrm>
+          <a:prstGeom prst="rect">
+            <a:avLst/>
+          </a:prstGeom>
+          <a:noFill/>
+        </p:spPr>
+        <p:txBody>
+          <a:bodyPr wrap="square">
+            <a:spAutoFit/>
+          </a:bodyPr>
+          <a:lstStyle/>
+          <a:p>
+            <a:pPr>
+              <a:defRPr sz="1100" b="1">
+                <a:solidFill>
+                  <a:srgbClr val="16191F"/>
+                </a:solidFill>
+              </a:defRPr>
+            </a:pPr>
+            <a:r>
+              <a:t>Setup Registration API &amp; Infra on US-WEST-2</a:t>
+            </a:r>
+          </a:p>
+        </p:txBody>
+      </p:sp>
+      <p:sp>
+        <p:nvSpPr>
+          <p:cNvPr id="22" name="TextBox 21"/>
+          <p:cNvSpPr txBox="1"/>
+          <p:nvPr/>
+        </p:nvSpPr>
+        <p:spPr>
+          <a:xfrm>
+            <a:off x="720000" y="2290000"/>
+            <a:ext cx="3700000" cy="200000"/>
+          </a:xfrm>
+          <a:prstGeom prst="rect">
+            <a:avLst/>
+          </a:prstGeom>
+          <a:noFill/>
+        </p:spPr>
+        <p:txBody>
+          <a:bodyPr wrap="square">
+            <a:spAutoFit/>
+          </a:bodyPr>
+          <a:lstStyle/>
+          <a:p>
+            <a:pPr>
+              <a:defRPr sz="900">
+                <a:solidFill>
+                  <a:srgbClr val="545B64"/>
+                </a:solidFill>
+              </a:defRPr>
+            </a:pPr>
+            <a:r>
+              <a:t>Deploy Registration API services, ECS tasks, and supporting infrastructure</a:t>
+            </a:r>
+          </a:p>
+        </p:txBody>
+      </p:sp>
+      <p:sp>
+        <p:nvSpPr>
+          <p:cNvPr id="23" name="Rectangle 22"/>
+          <p:cNvSpPr/>
+          <p:nvPr/>
+        </p:nvSpPr>
+        <p:spPr>
+          <a:xfrm>
+            <a:off x="300000" y="2560000"/>
+            <a:ext cx="4200000" cy="480000"/>
+          </a:xfrm>
+          <a:prstGeom prst="rect">
+            <a:avLst/>
+          </a:prstGeom>
+          <a:solidFill>
+            <a:srgbClr val="F0F3FF"/>
+          </a:solidFill>
+          <a:ln w="6350">
+            <a:solidFill>
+              <a:srgbClr val="D5DBDB"/>
+            </a:solidFill>
+          </a:ln>
+        </p:spPr>
+        <p:style>
+          <a:lnRef idx="1">
+            <a:schemeClr val="accent1"/>
+          </a:lnRef>
+          <a:fillRef idx="3">
+            <a:schemeClr val="accent1"/>
+          </a:fillRef>
+          <a:effectRef idx="2">
+            <a:schemeClr val="accent1"/>
+          </a:effectRef>
+          <a:fontRef idx="minor">
+            <a:schemeClr val="lt1"/>
+          </a:fontRef>
+        </p:style>
+        <p:txBody>
+          <a:bodyPr rtlCol="0" anchor="ctr"/>
+          <a:lstStyle/>
           <a:p>
             <a:pPr algn="ctr"/>
-            <a:r>
-              <a:rPr sz="1100" b="1">
+          </a:p>
+        </p:txBody>
+      </p:sp>
+      <p:sp>
+        <p:nvSpPr>
+          <p:cNvPr id="24" name="Rectangle 23"/>
+          <p:cNvSpPr/>
+          <p:nvPr/>
+        </p:nvSpPr>
+        <p:spPr>
+          <a:xfrm>
+            <a:off x="380000" y="2660000"/>
+            <a:ext cx="260000" cy="260000"/>
+          </a:xfrm>
+          <a:prstGeom prst="rect">
+            <a:avLst/>
+          </a:prstGeom>
+          <a:solidFill>
+            <a:srgbClr val="4053D6"/>
+          </a:solidFill>
+          <a:ln>
+            <a:noFill/>
+          </a:ln>
+        </p:spPr>
+        <p:style>
+          <a:lnRef idx="1">
+            <a:schemeClr val="accent1"/>
+          </a:lnRef>
+          <a:fillRef idx="3">
+            <a:schemeClr val="accent1"/>
+          </a:fillRef>
+          <a:effectRef idx="2">
+            <a:schemeClr val="accent1"/>
+          </a:effectRef>
+          <a:fontRef idx="minor">
+            <a:schemeClr val="lt1"/>
+          </a:fontRef>
+        </p:style>
+        <p:txBody>
+          <a:bodyPr rtlCol="0" anchor="ctr" wrap="none"/>
+          <a:lstStyle/>
+          <a:p>
+            <a:pPr algn="ctr">
+              <a:spcBef>
+                <a:spcPts val="200"/>
+              </a:spcBef>
+              <a:defRPr sz="1200" b="1">
                 <a:solidFill>
                   <a:srgbClr val="FFFFFF"/>
                 </a:solidFill>
-              </a:rPr>
-              <a:t>DR Drills</a:t>
-            </a:r>
-          </a:p>
+              </a:defRPr>
+            </a:pPr>
+            <a:r>
+              <a:t>3</a:t>
+            </a:r>
+          </a:p>
+        </p:txBody>
+      </p:sp>
+      <p:sp>
+        <p:nvSpPr>
+          <p:cNvPr id="25" name="TextBox 24"/>
+          <p:cNvSpPr txBox="1"/>
+          <p:nvPr/>
+        </p:nvSpPr>
+        <p:spPr>
+          <a:xfrm>
+            <a:off x="720000" y="2620000"/>
+            <a:ext cx="3700000" cy="200000"/>
+          </a:xfrm>
+          <a:prstGeom prst="rect">
+            <a:avLst/>
+          </a:prstGeom>
+          <a:noFill/>
+        </p:spPr>
+        <p:txBody>
+          <a:bodyPr wrap="square">
+            <a:spAutoFit/>
+          </a:bodyPr>
+          <a:lstStyle/>
+          <a:p>
+            <a:pPr>
+              <a:defRPr sz="1100" b="1">
+                <a:solidFill>
+                  <a:srgbClr val="16191F"/>
+                </a:solidFill>
+              </a:defRPr>
+            </a:pPr>
+            <a:r>
+              <a:t>Setup Replication of DynamoDB &amp; Other Data</a:t>
+            </a:r>
+          </a:p>
+        </p:txBody>
+      </p:sp>
+      <p:sp>
+        <p:nvSpPr>
+          <p:cNvPr id="26" name="TextBox 25"/>
+          <p:cNvSpPr txBox="1"/>
+          <p:nvPr/>
+        </p:nvSpPr>
+        <p:spPr>
+          <a:xfrm>
+            <a:off x="720000" y="2820000"/>
+            <a:ext cx="3700000" cy="200000"/>
+          </a:xfrm>
+          <a:prstGeom prst="rect">
+            <a:avLst/>
+          </a:prstGeom>
+          <a:noFill/>
+        </p:spPr>
+        <p:txBody>
+          <a:bodyPr wrap="square">
+            <a:spAutoFit/>
+          </a:bodyPr>
+          <a:lstStyle/>
+          <a:p>
+            <a:pPr>
+              <a:defRPr sz="900">
+                <a:solidFill>
+                  <a:srgbClr val="545B64"/>
+                </a:solidFill>
+              </a:defRPr>
+            </a:pPr>
+            <a:r>
+              <a:t>Enable DynamoDB Global Tables and replicate metadata to US-WEST-2</a:t>
+            </a:r>
+          </a:p>
+        </p:txBody>
+      </p:sp>
+      <p:sp>
+        <p:nvSpPr>
+          <p:cNvPr id="27" name="Rectangle 26"/>
+          <p:cNvSpPr/>
+          <p:nvPr/>
+        </p:nvSpPr>
+        <p:spPr>
+          <a:xfrm>
+            <a:off x="300000" y="3090000"/>
+            <a:ext cx="4200000" cy="480000"/>
+          </a:xfrm>
+          <a:prstGeom prst="rect">
+            <a:avLst/>
+          </a:prstGeom>
+          <a:solidFill>
+            <a:srgbClr val="F0F3FF"/>
+          </a:solidFill>
+          <a:ln w="6350">
+            <a:solidFill>
+              <a:srgbClr val="D5DBDB"/>
+            </a:solidFill>
+          </a:ln>
+        </p:spPr>
+        <p:style>
+          <a:lnRef idx="1">
+            <a:schemeClr val="accent1"/>
+          </a:lnRef>
+          <a:fillRef idx="3">
+            <a:schemeClr val="accent1"/>
+          </a:fillRef>
+          <a:effectRef idx="2">
+            <a:schemeClr val="accent1"/>
+          </a:effectRef>
+          <a:fontRef idx="minor">
+            <a:schemeClr val="lt1"/>
+          </a:fontRef>
+        </p:style>
+        <p:txBody>
+          <a:bodyPr rtlCol="0" anchor="ctr"/>
+          <a:lstStyle/>
           <a:p>
             <a:pPr algn="ctr"/>
-            <a:r>
-              <a:rPr sz="800">
-                <a:solidFill>
-                  <a:srgbClr val="94A3B8"/>
-                </a:solidFill>
-              </a:rPr>
-              <a:t>Weeks 17-20</a:t>
-            </a:r>
-          </a:p>
+          </a:p>
+        </p:txBody>
+      </p:sp>
+      <p:sp>
+        <p:nvSpPr>
+          <p:cNvPr id="28" name="Rectangle 27"/>
+          <p:cNvSpPr/>
+          <p:nvPr/>
+        </p:nvSpPr>
+        <p:spPr>
+          <a:xfrm>
+            <a:off x="380000" y="3190000"/>
+            <a:ext cx="260000" cy="260000"/>
+          </a:xfrm>
+          <a:prstGeom prst="rect">
+            <a:avLst/>
+          </a:prstGeom>
+          <a:solidFill>
+            <a:srgbClr val="4053D6"/>
+          </a:solidFill>
+          <a:ln>
+            <a:noFill/>
+          </a:ln>
+        </p:spPr>
+        <p:style>
+          <a:lnRef idx="1">
+            <a:schemeClr val="accent1"/>
+          </a:lnRef>
+          <a:fillRef idx="3">
+            <a:schemeClr val="accent1"/>
+          </a:fillRef>
+          <a:effectRef idx="2">
+            <a:schemeClr val="accent1"/>
+          </a:effectRef>
+          <a:fontRef idx="minor">
+            <a:schemeClr val="lt1"/>
+          </a:fontRef>
+        </p:style>
+        <p:txBody>
+          <a:bodyPr rtlCol="0" anchor="ctr" wrap="none"/>
+          <a:lstStyle/>
+          <a:p>
+            <a:pPr algn="ctr">
+              <a:spcBef>
+                <a:spcPts val="200"/>
+              </a:spcBef>
+              <a:defRPr sz="1200" b="1">
+                <a:solidFill>
+                  <a:srgbClr val="FFFFFF"/>
+                </a:solidFill>
+              </a:defRPr>
+            </a:pPr>
+            <a:r>
+              <a:t>4</a:t>
+            </a:r>
+          </a:p>
+        </p:txBody>
+      </p:sp>
+      <p:sp>
+        <p:nvSpPr>
+          <p:cNvPr id="29" name="TextBox 28"/>
+          <p:cNvSpPr txBox="1"/>
+          <p:nvPr/>
+        </p:nvSpPr>
+        <p:spPr>
+          <a:xfrm>
+            <a:off x="720000" y="3150000"/>
+            <a:ext cx="3700000" cy="200000"/>
+          </a:xfrm>
+          <a:prstGeom prst="rect">
+            <a:avLst/>
+          </a:prstGeom>
+          <a:noFill/>
+        </p:spPr>
+        <p:txBody>
+          <a:bodyPr wrap="square">
+            <a:spAutoFit/>
+          </a:bodyPr>
+          <a:lstStyle/>
+          <a:p>
+            <a:pPr>
+              <a:defRPr sz="1100" b="1">
+                <a:solidFill>
+                  <a:srgbClr val="16191F"/>
+                </a:solidFill>
+              </a:defRPr>
+            </a:pPr>
+            <a:r>
+              <a:t>Setup Producer Notification API on US-WEST-2</a:t>
+            </a:r>
+          </a:p>
+        </p:txBody>
+      </p:sp>
+      <p:sp>
+        <p:nvSpPr>
+          <p:cNvPr id="30" name="TextBox 29"/>
+          <p:cNvSpPr txBox="1"/>
+          <p:nvPr/>
+        </p:nvSpPr>
+        <p:spPr>
+          <a:xfrm>
+            <a:off x="720000" y="3350000"/>
+            <a:ext cx="3700000" cy="200000"/>
+          </a:xfrm>
+          <a:prstGeom prst="rect">
+            <a:avLst/>
+          </a:prstGeom>
+          <a:noFill/>
+        </p:spPr>
+        <p:txBody>
+          <a:bodyPr wrap="square">
+            <a:spAutoFit/>
+          </a:bodyPr>
+          <a:lstStyle/>
+          <a:p>
+            <a:pPr>
+              <a:defRPr sz="900">
+                <a:solidFill>
+                  <a:srgbClr val="545B64"/>
+                </a:solidFill>
+              </a:defRPr>
+            </a:pPr>
+            <a:r>
+              <a:t>Deploy producer-facing notification services in the secondary region</a:t>
+            </a:r>
+          </a:p>
+        </p:txBody>
+      </p:sp>
+      <p:sp>
+        <p:nvSpPr>
+          <p:cNvPr id="31" name="Rectangle 30"/>
+          <p:cNvSpPr/>
+          <p:nvPr/>
+        </p:nvSpPr>
+        <p:spPr>
+          <a:xfrm>
+            <a:off x="300000" y="3620000"/>
+            <a:ext cx="4200000" cy="480000"/>
+          </a:xfrm>
+          <a:prstGeom prst="rect">
+            <a:avLst/>
+          </a:prstGeom>
+          <a:solidFill>
+            <a:srgbClr val="F0F3FF"/>
+          </a:solidFill>
+          <a:ln w="6350">
+            <a:solidFill>
+              <a:srgbClr val="D5DBDB"/>
+            </a:solidFill>
+          </a:ln>
+        </p:spPr>
+        <p:style>
+          <a:lnRef idx="1">
+            <a:schemeClr val="accent1"/>
+          </a:lnRef>
+          <a:fillRef idx="3">
+            <a:schemeClr val="accent1"/>
+          </a:fillRef>
+          <a:effectRef idx="2">
+            <a:schemeClr val="accent1"/>
+          </a:effectRef>
+          <a:fontRef idx="minor">
+            <a:schemeClr val="lt1"/>
+          </a:fontRef>
+        </p:style>
+        <p:txBody>
+          <a:bodyPr rtlCol="0" anchor="ctr"/>
+          <a:lstStyle/>
           <a:p>
             <a:pPr algn="ctr"/>
-            <a:r>
-              <a:rPr sz="700">
-                <a:solidFill>
-                  <a:srgbClr val="64748B"/>
-                </a:solidFill>
-              </a:rPr>
-              <a:t>Runbook test, DR drill,
-validation, hardening</a:t>
+          </a:p>
+        </p:txBody>
+      </p:sp>
+      <p:sp>
+        <p:nvSpPr>
+          <p:cNvPr id="32" name="Rectangle 31"/>
+          <p:cNvSpPr/>
+          <p:nvPr/>
+        </p:nvSpPr>
+        <p:spPr>
+          <a:xfrm>
+            <a:off x="380000" y="3720000"/>
+            <a:ext cx="260000" cy="260000"/>
+          </a:xfrm>
+          <a:prstGeom prst="rect">
+            <a:avLst/>
+          </a:prstGeom>
+          <a:solidFill>
+            <a:srgbClr val="4053D6"/>
+          </a:solidFill>
+          <a:ln>
+            <a:noFill/>
+          </a:ln>
+        </p:spPr>
+        <p:style>
+          <a:lnRef idx="1">
+            <a:schemeClr val="accent1"/>
+          </a:lnRef>
+          <a:fillRef idx="3">
+            <a:schemeClr val="accent1"/>
+          </a:fillRef>
+          <a:effectRef idx="2">
+            <a:schemeClr val="accent1"/>
+          </a:effectRef>
+          <a:fontRef idx="minor">
+            <a:schemeClr val="lt1"/>
+          </a:fontRef>
+        </p:style>
+        <p:txBody>
+          <a:bodyPr rtlCol="0" anchor="ctr" wrap="none"/>
+          <a:lstStyle/>
+          <a:p>
+            <a:pPr algn="ctr">
+              <a:spcBef>
+                <a:spcPts val="200"/>
+              </a:spcBef>
+              <a:defRPr sz="1200" b="1">
+                <a:solidFill>
+                  <a:srgbClr val="FFFFFF"/>
+                </a:solidFill>
+              </a:defRPr>
+            </a:pPr>
+            <a:r>
+              <a:t>5</a:t>
+            </a:r>
+          </a:p>
+        </p:txBody>
+      </p:sp>
+      <p:sp>
+        <p:nvSpPr>
+          <p:cNvPr id="33" name="TextBox 32"/>
+          <p:cNvSpPr txBox="1"/>
+          <p:nvPr/>
+        </p:nvSpPr>
+        <p:spPr>
+          <a:xfrm>
+            <a:off x="720000" y="3680000"/>
+            <a:ext cx="3700000" cy="200000"/>
+          </a:xfrm>
+          <a:prstGeom prst="rect">
+            <a:avLst/>
+          </a:prstGeom>
+          <a:noFill/>
+        </p:spPr>
+        <p:txBody>
+          <a:bodyPr wrap="square">
+            <a:spAutoFit/>
+          </a:bodyPr>
+          <a:lstStyle/>
+          <a:p>
+            <a:pPr>
+              <a:defRPr sz="1100" b="1">
+                <a:solidFill>
+                  <a:srgbClr val="16191F"/>
+                </a:solidFill>
+              </a:defRPr>
+            </a:pPr>
+            <a:r>
+              <a:t>Setup Consumer Notification (API &amp; SNS)</a:t>
+            </a:r>
+          </a:p>
+        </p:txBody>
+      </p:sp>
+      <p:sp>
+        <p:nvSpPr>
+          <p:cNvPr id="34" name="TextBox 33"/>
+          <p:cNvSpPr txBox="1"/>
+          <p:nvPr/>
+        </p:nvSpPr>
+        <p:spPr>
+          <a:xfrm>
+            <a:off x="720000" y="3880000"/>
+            <a:ext cx="3700000" cy="200000"/>
+          </a:xfrm>
+          <a:prstGeom prst="rect">
+            <a:avLst/>
+          </a:prstGeom>
+          <a:noFill/>
+        </p:spPr>
+        <p:txBody>
+          <a:bodyPr wrap="square">
+            <a:spAutoFit/>
+          </a:bodyPr>
+          <a:lstStyle/>
+          <a:p>
+            <a:pPr>
+              <a:defRPr sz="900">
+                <a:solidFill>
+                  <a:srgbClr val="545B64"/>
+                </a:solidFill>
+              </a:defRPr>
+            </a:pPr>
+            <a:r>
+              <a:t>Deploy consumer notification API and configure SNS topics in US-WEST-2</a:t>
+            </a:r>
+          </a:p>
+        </p:txBody>
+      </p:sp>
+      <p:sp>
+        <p:nvSpPr>
+          <p:cNvPr id="35" name="Rectangle 34"/>
+          <p:cNvSpPr/>
+          <p:nvPr/>
+        </p:nvSpPr>
+        <p:spPr>
+          <a:xfrm>
+            <a:off x="300000" y="4150000"/>
+            <a:ext cx="4200000" cy="480000"/>
+          </a:xfrm>
+          <a:prstGeom prst="rect">
+            <a:avLst/>
+          </a:prstGeom>
+          <a:solidFill>
+            <a:srgbClr val="F0F3FF"/>
+          </a:solidFill>
+          <a:ln w="6350">
+            <a:solidFill>
+              <a:srgbClr val="D5DBDB"/>
+            </a:solidFill>
+          </a:ln>
+        </p:spPr>
+        <p:style>
+          <a:lnRef idx="1">
+            <a:schemeClr val="accent1"/>
+          </a:lnRef>
+          <a:fillRef idx="3">
+            <a:schemeClr val="accent1"/>
+          </a:fillRef>
+          <a:effectRef idx="2">
+            <a:schemeClr val="accent1"/>
+          </a:effectRef>
+          <a:fontRef idx="minor">
+            <a:schemeClr val="lt1"/>
+          </a:fontRef>
+        </p:style>
+        <p:txBody>
+          <a:bodyPr rtlCol="0" anchor="ctr"/>
+          <a:lstStyle/>
+          <a:p>
+            <a:pPr algn="ctr"/>
+          </a:p>
+        </p:txBody>
+      </p:sp>
+      <p:sp>
+        <p:nvSpPr>
+          <p:cNvPr id="36" name="Rectangle 35"/>
+          <p:cNvSpPr/>
+          <p:nvPr/>
+        </p:nvSpPr>
+        <p:spPr>
+          <a:xfrm>
+            <a:off x="380000" y="4250000"/>
+            <a:ext cx="260000" cy="260000"/>
+          </a:xfrm>
+          <a:prstGeom prst="rect">
+            <a:avLst/>
+          </a:prstGeom>
+          <a:solidFill>
+            <a:srgbClr val="4053D6"/>
+          </a:solidFill>
+          <a:ln>
+            <a:noFill/>
+          </a:ln>
+        </p:spPr>
+        <p:style>
+          <a:lnRef idx="1">
+            <a:schemeClr val="accent1"/>
+          </a:lnRef>
+          <a:fillRef idx="3">
+            <a:schemeClr val="accent1"/>
+          </a:fillRef>
+          <a:effectRef idx="2">
+            <a:schemeClr val="accent1"/>
+          </a:effectRef>
+          <a:fontRef idx="minor">
+            <a:schemeClr val="lt1"/>
+          </a:fontRef>
+        </p:style>
+        <p:txBody>
+          <a:bodyPr rtlCol="0" anchor="ctr" wrap="none"/>
+          <a:lstStyle/>
+          <a:p>
+            <a:pPr algn="ctr">
+              <a:spcBef>
+                <a:spcPts val="200"/>
+              </a:spcBef>
+              <a:defRPr sz="1200" b="1">
+                <a:solidFill>
+                  <a:srgbClr val="FFFFFF"/>
+                </a:solidFill>
+              </a:defRPr>
+            </a:pPr>
+            <a:r>
+              <a:t>6</a:t>
+            </a:r>
+          </a:p>
+        </p:txBody>
+      </p:sp>
+      <p:sp>
+        <p:nvSpPr>
+          <p:cNvPr id="37" name="TextBox 36"/>
+          <p:cNvSpPr txBox="1"/>
+          <p:nvPr/>
+        </p:nvSpPr>
+        <p:spPr>
+          <a:xfrm>
+            <a:off x="720000" y="4210000"/>
+            <a:ext cx="3700000" cy="200000"/>
+          </a:xfrm>
+          <a:prstGeom prst="rect">
+            <a:avLst/>
+          </a:prstGeom>
+          <a:noFill/>
+        </p:spPr>
+        <p:txBody>
+          <a:bodyPr wrap="square">
+            <a:spAutoFit/>
+          </a:bodyPr>
+          <a:lstStyle/>
+          <a:p>
+            <a:pPr>
+              <a:defRPr sz="1100" b="1">
+                <a:solidFill>
+                  <a:srgbClr val="16191F"/>
+                </a:solidFill>
+              </a:defRPr>
+            </a:pPr>
+            <a:r>
+              <a:t>Registration Changes</a:t>
+            </a:r>
+          </a:p>
+        </p:txBody>
+      </p:sp>
+      <p:sp>
+        <p:nvSpPr>
+          <p:cNvPr id="38" name="TextBox 37"/>
+          <p:cNvSpPr txBox="1"/>
+          <p:nvPr/>
+        </p:nvSpPr>
+        <p:spPr>
+          <a:xfrm>
+            <a:off x="720000" y="4410000"/>
+            <a:ext cx="3700000" cy="200000"/>
+          </a:xfrm>
+          <a:prstGeom prst="rect">
+            <a:avLst/>
+          </a:prstGeom>
+          <a:noFill/>
+        </p:spPr>
+        <p:txBody>
+          <a:bodyPr wrap="square">
+            <a:spAutoFit/>
+          </a:bodyPr>
+          <a:lstStyle/>
+          <a:p>
+            <a:pPr>
+              <a:defRPr sz="900">
+                <a:solidFill>
+                  <a:srgbClr val="545B64"/>
+                </a:solidFill>
+              </a:defRPr>
+            </a:pPr>
+            <a:r>
+              <a:t>US-WEST-2 producer registration and Snowflake Private Listing support</a:t>
+            </a:r>
+          </a:p>
+        </p:txBody>
+      </p:sp>
+      <p:sp>
+        <p:nvSpPr>
+          <p:cNvPr id="39" name="Rectangle 38"/>
+          <p:cNvSpPr/>
+          <p:nvPr/>
+        </p:nvSpPr>
+        <p:spPr>
+          <a:xfrm>
+            <a:off x="300000" y="4680000"/>
+            <a:ext cx="4200000" cy="480000"/>
+          </a:xfrm>
+          <a:prstGeom prst="rect">
+            <a:avLst/>
+          </a:prstGeom>
+          <a:solidFill>
+            <a:srgbClr val="F0F3FF"/>
+          </a:solidFill>
+          <a:ln w="6350">
+            <a:solidFill>
+              <a:srgbClr val="D5DBDB"/>
+            </a:solidFill>
+          </a:ln>
+        </p:spPr>
+        <p:style>
+          <a:lnRef idx="1">
+            <a:schemeClr val="accent1"/>
+          </a:lnRef>
+          <a:fillRef idx="3">
+            <a:schemeClr val="accent1"/>
+          </a:fillRef>
+          <a:effectRef idx="2">
+            <a:schemeClr val="accent1"/>
+          </a:effectRef>
+          <a:fontRef idx="minor">
+            <a:schemeClr val="lt1"/>
+          </a:fontRef>
+        </p:style>
+        <p:txBody>
+          <a:bodyPr rtlCol="0" anchor="ctr"/>
+          <a:lstStyle/>
+          <a:p>
+            <a:pPr algn="ctr"/>
+          </a:p>
+        </p:txBody>
+      </p:sp>
+      <p:sp>
+        <p:nvSpPr>
+          <p:cNvPr id="40" name="Rectangle 39"/>
+          <p:cNvSpPr/>
+          <p:nvPr/>
+        </p:nvSpPr>
+        <p:spPr>
+          <a:xfrm>
+            <a:off x="380000" y="4780000"/>
+            <a:ext cx="260000" cy="260000"/>
+          </a:xfrm>
+          <a:prstGeom prst="rect">
+            <a:avLst/>
+          </a:prstGeom>
+          <a:solidFill>
+            <a:srgbClr val="4053D6"/>
+          </a:solidFill>
+          <a:ln>
+            <a:noFill/>
+          </a:ln>
+        </p:spPr>
+        <p:style>
+          <a:lnRef idx="1">
+            <a:schemeClr val="accent1"/>
+          </a:lnRef>
+          <a:fillRef idx="3">
+            <a:schemeClr val="accent1"/>
+          </a:fillRef>
+          <a:effectRef idx="2">
+            <a:schemeClr val="accent1"/>
+          </a:effectRef>
+          <a:fontRef idx="minor">
+            <a:schemeClr val="lt1"/>
+          </a:fontRef>
+        </p:style>
+        <p:txBody>
+          <a:bodyPr rtlCol="0" anchor="ctr" wrap="none"/>
+          <a:lstStyle/>
+          <a:p>
+            <a:pPr algn="ctr">
+              <a:spcBef>
+                <a:spcPts val="200"/>
+              </a:spcBef>
+              <a:defRPr sz="1200" b="1">
+                <a:solidFill>
+                  <a:srgbClr val="FFFFFF"/>
+                </a:solidFill>
+              </a:defRPr>
+            </a:pPr>
+            <a:r>
+              <a:t>7</a:t>
+            </a:r>
+          </a:p>
+        </p:txBody>
+      </p:sp>
+      <p:sp>
+        <p:nvSpPr>
+          <p:cNvPr id="41" name="TextBox 40"/>
+          <p:cNvSpPr txBox="1"/>
+          <p:nvPr/>
+        </p:nvSpPr>
+        <p:spPr>
+          <a:xfrm>
+            <a:off x="720000" y="4740000"/>
+            <a:ext cx="3700000" cy="200000"/>
+          </a:xfrm>
+          <a:prstGeom prst="rect">
+            <a:avLst/>
+          </a:prstGeom>
+          <a:noFill/>
+        </p:spPr>
+        <p:txBody>
+          <a:bodyPr wrap="square">
+            <a:spAutoFit/>
+          </a:bodyPr>
+          <a:lstStyle/>
+          <a:p>
+            <a:pPr>
+              <a:defRPr sz="1100" b="1">
+                <a:solidFill>
+                  <a:srgbClr val="16191F"/>
+                </a:solidFill>
+              </a:defRPr>
+            </a:pPr>
+            <a:r>
+              <a:t>Dex Integration / Changes</a:t>
+            </a:r>
+          </a:p>
+        </p:txBody>
+      </p:sp>
+      <p:sp>
+        <p:nvSpPr>
+          <p:cNvPr id="42" name="TextBox 41"/>
+          <p:cNvSpPr txBox="1"/>
+          <p:nvPr/>
+        </p:nvSpPr>
+        <p:spPr>
+          <a:xfrm>
+            <a:off x="720000" y="4940000"/>
+            <a:ext cx="3700000" cy="200000"/>
+          </a:xfrm>
+          <a:prstGeom prst="rect">
+            <a:avLst/>
+          </a:prstGeom>
+          <a:noFill/>
+        </p:spPr>
+        <p:txBody>
+          <a:bodyPr wrap="square">
+            <a:spAutoFit/>
+          </a:bodyPr>
+          <a:lstStyle/>
+          <a:p>
+            <a:pPr>
+              <a:defRPr sz="900">
+                <a:solidFill>
+                  <a:srgbClr val="545B64"/>
+                </a:solidFill>
+              </a:defRPr>
+            </a:pPr>
+            <a:r>
+              <a:t>Update Dex for multi-region setup and cross-region coordination</a:t>
+            </a:r>
+          </a:p>
+        </p:txBody>
+      </p:sp>
+      <p:sp>
+        <p:nvSpPr>
+          <p:cNvPr id="43" name="Rectangle 42"/>
+          <p:cNvSpPr/>
+          <p:nvPr/>
+        </p:nvSpPr>
+        <p:spPr>
+          <a:xfrm>
+            <a:off x="300000" y="5210000"/>
+            <a:ext cx="4200000" cy="480000"/>
+          </a:xfrm>
+          <a:prstGeom prst="rect">
+            <a:avLst/>
+          </a:prstGeom>
+          <a:solidFill>
+            <a:srgbClr val="F0F3FF"/>
+          </a:solidFill>
+          <a:ln w="6350">
+            <a:solidFill>
+              <a:srgbClr val="D5DBDB"/>
+            </a:solidFill>
+          </a:ln>
+        </p:spPr>
+        <p:style>
+          <a:lnRef idx="1">
+            <a:schemeClr val="accent1"/>
+          </a:lnRef>
+          <a:fillRef idx="3">
+            <a:schemeClr val="accent1"/>
+          </a:fillRef>
+          <a:effectRef idx="2">
+            <a:schemeClr val="accent1"/>
+          </a:effectRef>
+          <a:fontRef idx="minor">
+            <a:schemeClr val="lt1"/>
+          </a:fontRef>
+        </p:style>
+        <p:txBody>
+          <a:bodyPr rtlCol="0" anchor="ctr"/>
+          <a:lstStyle/>
+          <a:p>
+            <a:pPr algn="ctr"/>
+          </a:p>
+        </p:txBody>
+      </p:sp>
+      <p:sp>
+        <p:nvSpPr>
+          <p:cNvPr id="44" name="Rectangle 43"/>
+          <p:cNvSpPr/>
+          <p:nvPr/>
+        </p:nvSpPr>
+        <p:spPr>
+          <a:xfrm>
+            <a:off x="380000" y="5310000"/>
+            <a:ext cx="260000" cy="260000"/>
+          </a:xfrm>
+          <a:prstGeom prst="rect">
+            <a:avLst/>
+          </a:prstGeom>
+          <a:solidFill>
+            <a:srgbClr val="4053D6"/>
+          </a:solidFill>
+          <a:ln>
+            <a:noFill/>
+          </a:ln>
+        </p:spPr>
+        <p:style>
+          <a:lnRef idx="1">
+            <a:schemeClr val="accent1"/>
+          </a:lnRef>
+          <a:fillRef idx="3">
+            <a:schemeClr val="accent1"/>
+          </a:fillRef>
+          <a:effectRef idx="2">
+            <a:schemeClr val="accent1"/>
+          </a:effectRef>
+          <a:fontRef idx="minor">
+            <a:schemeClr val="lt1"/>
+          </a:fontRef>
+        </p:style>
+        <p:txBody>
+          <a:bodyPr rtlCol="0" anchor="ctr" wrap="none"/>
+          <a:lstStyle/>
+          <a:p>
+            <a:pPr algn="ctr">
+              <a:spcBef>
+                <a:spcPts val="200"/>
+              </a:spcBef>
+              <a:defRPr sz="1200" b="1">
+                <a:solidFill>
+                  <a:srgbClr val="FFFFFF"/>
+                </a:solidFill>
+              </a:defRPr>
+            </a:pPr>
+            <a:r>
+              <a:t>8</a:t>
+            </a:r>
+          </a:p>
+        </p:txBody>
+      </p:sp>
+      <p:sp>
+        <p:nvSpPr>
+          <p:cNvPr id="45" name="TextBox 44"/>
+          <p:cNvSpPr txBox="1"/>
+          <p:nvPr/>
+        </p:nvSpPr>
+        <p:spPr>
+          <a:xfrm>
+            <a:off x="720000" y="5270000"/>
+            <a:ext cx="3700000" cy="200000"/>
+          </a:xfrm>
+          <a:prstGeom prst="rect">
+            <a:avLst/>
+          </a:prstGeom>
+          <a:noFill/>
+        </p:spPr>
+        <p:txBody>
+          <a:bodyPr wrap="square">
+            <a:spAutoFit/>
+          </a:bodyPr>
+          <a:lstStyle/>
+          <a:p>
+            <a:pPr>
+              <a:defRPr sz="1100" b="1">
+                <a:solidFill>
+                  <a:srgbClr val="16191F"/>
+                </a:solidFill>
+              </a:defRPr>
+            </a:pPr>
+            <a:r>
+              <a:t>Updates to Route53</a:t>
+            </a:r>
+          </a:p>
+        </p:txBody>
+      </p:sp>
+      <p:sp>
+        <p:nvSpPr>
+          <p:cNvPr id="46" name="TextBox 45"/>
+          <p:cNvSpPr txBox="1"/>
+          <p:nvPr/>
+        </p:nvSpPr>
+        <p:spPr>
+          <a:xfrm>
+            <a:off x="720000" y="5470000"/>
+            <a:ext cx="3700000" cy="200000"/>
+          </a:xfrm>
+          <a:prstGeom prst="rect">
+            <a:avLst/>
+          </a:prstGeom>
+          <a:noFill/>
+        </p:spPr>
+        <p:txBody>
+          <a:bodyPr wrap="square">
+            <a:spAutoFit/>
+          </a:bodyPr>
+          <a:lstStyle/>
+          <a:p>
+            <a:pPr>
+              <a:defRPr sz="900">
+                <a:solidFill>
+                  <a:srgbClr val="545B64"/>
+                </a:solidFill>
+              </a:defRPr>
+            </a:pPr>
+            <a:r>
+              <a:t>Add US-WEST-2 endpoints and configure DNS failover routing policies</a:t>
+            </a:r>
+          </a:p>
+        </p:txBody>
+      </p:sp>
+      <p:sp>
+        <p:nvSpPr>
+          <p:cNvPr id="47" name="Rectangle 46"/>
+          <p:cNvSpPr/>
+          <p:nvPr/>
+        </p:nvSpPr>
+        <p:spPr>
+          <a:xfrm>
+            <a:off x="4640000" y="1500000"/>
+            <a:ext cx="3300000" cy="480000"/>
+          </a:xfrm>
+          <a:prstGeom prst="rect">
+            <a:avLst/>
+          </a:prstGeom>
+          <a:solidFill>
+            <a:srgbClr val="E3FCDE"/>
+          </a:solidFill>
+          <a:ln w="6350">
+            <a:solidFill>
+              <a:srgbClr val="D5DBDB"/>
+            </a:solidFill>
+          </a:ln>
+        </p:spPr>
+        <p:style>
+          <a:lnRef idx="1">
+            <a:schemeClr val="accent1"/>
+          </a:lnRef>
+          <a:fillRef idx="3">
+            <a:schemeClr val="accent1"/>
+          </a:fillRef>
+          <a:effectRef idx="2">
+            <a:schemeClr val="accent1"/>
+          </a:effectRef>
+          <a:fontRef idx="minor">
+            <a:schemeClr val="lt1"/>
+          </a:fontRef>
+        </p:style>
+        <p:txBody>
+          <a:bodyPr rtlCol="0" anchor="ctr"/>
+          <a:lstStyle/>
+          <a:p>
+            <a:pPr algn="ctr"/>
+          </a:p>
+        </p:txBody>
+      </p:sp>
+      <p:sp>
+        <p:nvSpPr>
+          <p:cNvPr id="48" name="Rectangle 47"/>
+          <p:cNvSpPr/>
+          <p:nvPr/>
+        </p:nvSpPr>
+        <p:spPr>
+          <a:xfrm>
+            <a:off x="4720000" y="1600000"/>
+            <a:ext cx="260000" cy="260000"/>
+          </a:xfrm>
+          <a:prstGeom prst="rect">
+            <a:avLst/>
+          </a:prstGeom>
+          <a:solidFill>
+            <a:srgbClr val="1D8102"/>
+          </a:solidFill>
+          <a:ln>
+            <a:noFill/>
+          </a:ln>
+        </p:spPr>
+        <p:style>
+          <a:lnRef idx="1">
+            <a:schemeClr val="accent1"/>
+          </a:lnRef>
+          <a:fillRef idx="3">
+            <a:schemeClr val="accent1"/>
+          </a:fillRef>
+          <a:effectRef idx="2">
+            <a:schemeClr val="accent1"/>
+          </a:effectRef>
+          <a:fontRef idx="minor">
+            <a:schemeClr val="lt1"/>
+          </a:fontRef>
+        </p:style>
+        <p:txBody>
+          <a:bodyPr rtlCol="0" anchor="ctr" wrap="none"/>
+          <a:lstStyle/>
+          <a:p>
+            <a:pPr algn="ctr">
+              <a:spcBef>
+                <a:spcPts val="200"/>
+              </a:spcBef>
+              <a:defRPr sz="1200" b="1">
+                <a:solidFill>
+                  <a:srgbClr val="FFFFFF"/>
+                </a:solidFill>
+              </a:defRPr>
+            </a:pPr>
+            <a:r>
+              <a:t>1</a:t>
+            </a:r>
+          </a:p>
+        </p:txBody>
+      </p:sp>
+      <p:sp>
+        <p:nvSpPr>
+          <p:cNvPr id="49" name="TextBox 48"/>
+          <p:cNvSpPr txBox="1"/>
+          <p:nvPr/>
+        </p:nvSpPr>
+        <p:spPr>
+          <a:xfrm>
+            <a:off x="5060000" y="1560000"/>
+            <a:ext cx="2800000" cy="200000"/>
+          </a:xfrm>
+          <a:prstGeom prst="rect">
+            <a:avLst/>
+          </a:prstGeom>
+          <a:noFill/>
+        </p:spPr>
+        <p:txBody>
+          <a:bodyPr wrap="square">
+            <a:spAutoFit/>
+          </a:bodyPr>
+          <a:lstStyle/>
+          <a:p>
+            <a:pPr>
+              <a:defRPr sz="1100" b="1">
+                <a:solidFill>
+                  <a:srgbClr val="16191F"/>
+                </a:solidFill>
+              </a:defRPr>
+            </a:pPr>
+            <a:r>
+              <a:t>Setup US-WEST-2 Region</a:t>
+            </a:r>
+          </a:p>
+        </p:txBody>
+      </p:sp>
+      <p:sp>
+        <p:nvSpPr>
+          <p:cNvPr id="50" name="TextBox 49"/>
+          <p:cNvSpPr txBox="1"/>
+          <p:nvPr/>
+        </p:nvSpPr>
+        <p:spPr>
+          <a:xfrm>
+            <a:off x="5060000" y="1760000"/>
+            <a:ext cx="2800000" cy="200000"/>
+          </a:xfrm>
+          <a:prstGeom prst="rect">
+            <a:avLst/>
+          </a:prstGeom>
+          <a:noFill/>
+        </p:spPr>
+        <p:txBody>
+          <a:bodyPr wrap="square">
+            <a:spAutoFit/>
+          </a:bodyPr>
+          <a:lstStyle/>
+          <a:p>
+            <a:pPr>
+              <a:defRPr sz="900">
+                <a:solidFill>
+                  <a:srgbClr val="545B64"/>
+                </a:solidFill>
+              </a:defRPr>
+            </a:pPr>
+            <a:r>
+              <a:t>Provision AWS accounts, VPCs, IAM roles, and access policies</a:t>
+            </a:r>
+          </a:p>
+        </p:txBody>
+      </p:sp>
+      <p:sp>
+        <p:nvSpPr>
+          <p:cNvPr id="51" name="Rectangle 50"/>
+          <p:cNvSpPr/>
+          <p:nvPr/>
+        </p:nvSpPr>
+        <p:spPr>
+          <a:xfrm>
+            <a:off x="4640000" y="2030000"/>
+            <a:ext cx="3300000" cy="480000"/>
+          </a:xfrm>
+          <a:prstGeom prst="rect">
+            <a:avLst/>
+          </a:prstGeom>
+          <a:solidFill>
+            <a:srgbClr val="E3FCDE"/>
+          </a:solidFill>
+          <a:ln w="6350">
+            <a:solidFill>
+              <a:srgbClr val="D5DBDB"/>
+            </a:solidFill>
+          </a:ln>
+        </p:spPr>
+        <p:style>
+          <a:lnRef idx="1">
+            <a:schemeClr val="accent1"/>
+          </a:lnRef>
+          <a:fillRef idx="3">
+            <a:schemeClr val="accent1"/>
+          </a:fillRef>
+          <a:effectRef idx="2">
+            <a:schemeClr val="accent1"/>
+          </a:effectRef>
+          <a:fontRef idx="minor">
+            <a:schemeClr val="lt1"/>
+          </a:fontRef>
+        </p:style>
+        <p:txBody>
+          <a:bodyPr rtlCol="0" anchor="ctr"/>
+          <a:lstStyle/>
+          <a:p>
+            <a:pPr algn="ctr"/>
+          </a:p>
+        </p:txBody>
+      </p:sp>
+      <p:sp>
+        <p:nvSpPr>
+          <p:cNvPr id="52" name="Rectangle 51"/>
+          <p:cNvSpPr/>
+          <p:nvPr/>
+        </p:nvSpPr>
+        <p:spPr>
+          <a:xfrm>
+            <a:off x="4720000" y="2130000"/>
+            <a:ext cx="260000" cy="260000"/>
+          </a:xfrm>
+          <a:prstGeom prst="rect">
+            <a:avLst/>
+          </a:prstGeom>
+          <a:solidFill>
+            <a:srgbClr val="1D8102"/>
+          </a:solidFill>
+          <a:ln>
+            <a:noFill/>
+          </a:ln>
+        </p:spPr>
+        <p:style>
+          <a:lnRef idx="1">
+            <a:schemeClr val="accent1"/>
+          </a:lnRef>
+          <a:fillRef idx="3">
+            <a:schemeClr val="accent1"/>
+          </a:fillRef>
+          <a:effectRef idx="2">
+            <a:schemeClr val="accent1"/>
+          </a:effectRef>
+          <a:fontRef idx="minor">
+            <a:schemeClr val="lt1"/>
+          </a:fontRef>
+        </p:style>
+        <p:txBody>
+          <a:bodyPr rtlCol="0" anchor="ctr" wrap="none"/>
+          <a:lstStyle/>
+          <a:p>
+            <a:pPr algn="ctr">
+              <a:spcBef>
+                <a:spcPts val="200"/>
+              </a:spcBef>
+              <a:defRPr sz="1200" b="1">
+                <a:solidFill>
+                  <a:srgbClr val="FFFFFF"/>
+                </a:solidFill>
+              </a:defRPr>
+            </a:pPr>
+            <a:r>
+              <a:t>2</a:t>
+            </a:r>
+          </a:p>
+        </p:txBody>
+      </p:sp>
+      <p:sp>
+        <p:nvSpPr>
+          <p:cNvPr id="53" name="TextBox 52"/>
+          <p:cNvSpPr txBox="1"/>
+          <p:nvPr/>
+        </p:nvSpPr>
+        <p:spPr>
+          <a:xfrm>
+            <a:off x="5060000" y="2090000"/>
+            <a:ext cx="2800000" cy="200000"/>
+          </a:xfrm>
+          <a:prstGeom prst="rect">
+            <a:avLst/>
+          </a:prstGeom>
+          <a:noFill/>
+        </p:spPr>
+        <p:txBody>
+          <a:bodyPr wrap="square">
+            <a:spAutoFit/>
+          </a:bodyPr>
+          <a:lstStyle/>
+          <a:p>
+            <a:pPr>
+              <a:defRPr sz="1100" b="1">
+                <a:solidFill>
+                  <a:srgbClr val="16191F"/>
+                </a:solidFill>
+              </a:defRPr>
+            </a:pPr>
+            <a:r>
+              <a:t>Replicate S3 Data to US-WEST-2</a:t>
+            </a:r>
+          </a:p>
+        </p:txBody>
+      </p:sp>
+      <p:sp>
+        <p:nvSpPr>
+          <p:cNvPr id="54" name="TextBox 53"/>
+          <p:cNvSpPr txBox="1"/>
+          <p:nvPr/>
+        </p:nvSpPr>
+        <p:spPr>
+          <a:xfrm>
+            <a:off x="5060000" y="2290000"/>
+            <a:ext cx="2800000" cy="200000"/>
+          </a:xfrm>
+          <a:prstGeom prst="rect">
+            <a:avLst/>
+          </a:prstGeom>
+          <a:noFill/>
+        </p:spPr>
+        <p:txBody>
+          <a:bodyPr wrap="square">
+            <a:spAutoFit/>
+          </a:bodyPr>
+          <a:lstStyle/>
+          <a:p>
+            <a:pPr>
+              <a:defRPr sz="900">
+                <a:solidFill>
+                  <a:srgbClr val="545B64"/>
+                </a:solidFill>
+              </a:defRPr>
+            </a:pPr>
+            <a:r>
+              <a:t>Enable S3 Cross-Region Replication for all producer datasets</a:t>
+            </a:r>
+          </a:p>
+        </p:txBody>
+      </p:sp>
+      <p:sp>
+        <p:nvSpPr>
+          <p:cNvPr id="55" name="Rectangle 54"/>
+          <p:cNvSpPr/>
+          <p:nvPr/>
+        </p:nvSpPr>
+        <p:spPr>
+          <a:xfrm>
+            <a:off x="4640000" y="2560000"/>
+            <a:ext cx="3300000" cy="480000"/>
+          </a:xfrm>
+          <a:prstGeom prst="rect">
+            <a:avLst/>
+          </a:prstGeom>
+          <a:solidFill>
+            <a:srgbClr val="E3FCDE"/>
+          </a:solidFill>
+          <a:ln w="6350">
+            <a:solidFill>
+              <a:srgbClr val="D5DBDB"/>
+            </a:solidFill>
+          </a:ln>
+        </p:spPr>
+        <p:style>
+          <a:lnRef idx="1">
+            <a:schemeClr val="accent1"/>
+          </a:lnRef>
+          <a:fillRef idx="3">
+            <a:schemeClr val="accent1"/>
+          </a:fillRef>
+          <a:effectRef idx="2">
+            <a:schemeClr val="accent1"/>
+          </a:effectRef>
+          <a:fontRef idx="minor">
+            <a:schemeClr val="lt1"/>
+          </a:fontRef>
+        </p:style>
+        <p:txBody>
+          <a:bodyPr rtlCol="0" anchor="ctr"/>
+          <a:lstStyle/>
+          <a:p>
+            <a:pPr algn="ctr"/>
+          </a:p>
+        </p:txBody>
+      </p:sp>
+      <p:sp>
+        <p:nvSpPr>
+          <p:cNvPr id="56" name="Rectangle 55"/>
+          <p:cNvSpPr/>
+          <p:nvPr/>
+        </p:nvSpPr>
+        <p:spPr>
+          <a:xfrm>
+            <a:off x="4720000" y="2660000"/>
+            <a:ext cx="260000" cy="260000"/>
+          </a:xfrm>
+          <a:prstGeom prst="rect">
+            <a:avLst/>
+          </a:prstGeom>
+          <a:solidFill>
+            <a:srgbClr val="1D8102"/>
+          </a:solidFill>
+          <a:ln>
+            <a:noFill/>
+          </a:ln>
+        </p:spPr>
+        <p:style>
+          <a:lnRef idx="1">
+            <a:schemeClr val="accent1"/>
+          </a:lnRef>
+          <a:fillRef idx="3">
+            <a:schemeClr val="accent1"/>
+          </a:fillRef>
+          <a:effectRef idx="2">
+            <a:schemeClr val="accent1"/>
+          </a:effectRef>
+          <a:fontRef idx="minor">
+            <a:schemeClr val="lt1"/>
+          </a:fontRef>
+        </p:style>
+        <p:txBody>
+          <a:bodyPr rtlCol="0" anchor="ctr" wrap="none"/>
+          <a:lstStyle/>
+          <a:p>
+            <a:pPr algn="ctr">
+              <a:spcBef>
+                <a:spcPts val="200"/>
+              </a:spcBef>
+              <a:defRPr sz="1200" b="1">
+                <a:solidFill>
+                  <a:srgbClr val="FFFFFF"/>
+                </a:solidFill>
+              </a:defRPr>
+            </a:pPr>
+            <a:r>
+              <a:t>3</a:t>
+            </a:r>
+          </a:p>
+        </p:txBody>
+      </p:sp>
+      <p:sp>
+        <p:nvSpPr>
+          <p:cNvPr id="57" name="TextBox 56"/>
+          <p:cNvSpPr txBox="1"/>
+          <p:nvPr/>
+        </p:nvSpPr>
+        <p:spPr>
+          <a:xfrm>
+            <a:off x="5060000" y="2620000"/>
+            <a:ext cx="2800000" cy="200000"/>
+          </a:xfrm>
+          <a:prstGeom prst="rect">
+            <a:avLst/>
+          </a:prstGeom>
+          <a:noFill/>
+        </p:spPr>
+        <p:txBody>
+          <a:bodyPr wrap="square">
+            <a:spAutoFit/>
+          </a:bodyPr>
+          <a:lstStyle/>
+          <a:p>
+            <a:pPr>
+              <a:defRPr sz="1100" b="1">
+                <a:solidFill>
+                  <a:srgbClr val="16191F"/>
+                </a:solidFill>
+              </a:defRPr>
+            </a:pPr>
+            <a:r>
+              <a:t>ETL Pipeline &amp; Glue Catalog Setup</a:t>
+            </a:r>
+          </a:p>
+        </p:txBody>
+      </p:sp>
+      <p:sp>
+        <p:nvSpPr>
+          <p:cNvPr id="58" name="TextBox 57"/>
+          <p:cNvSpPr txBox="1"/>
+          <p:nvPr/>
+        </p:nvSpPr>
+        <p:spPr>
+          <a:xfrm>
+            <a:off x="5060000" y="2820000"/>
+            <a:ext cx="2800000" cy="200000"/>
+          </a:xfrm>
+          <a:prstGeom prst="rect">
+            <a:avLst/>
+          </a:prstGeom>
+          <a:noFill/>
+        </p:spPr>
+        <p:txBody>
+          <a:bodyPr wrap="square">
+            <a:spAutoFit/>
+          </a:bodyPr>
+          <a:lstStyle/>
+          <a:p>
+            <a:pPr>
+              <a:defRPr sz="900">
+                <a:solidFill>
+                  <a:srgbClr val="545B64"/>
+                </a:solidFill>
+              </a:defRPr>
+            </a:pPr>
+            <a:r>
+              <a:t>Configure ETL pipelines and Glue Data Catalog entries for US-WEST-2</a:t>
+            </a:r>
+          </a:p>
+        </p:txBody>
+      </p:sp>
+      <p:sp>
+        <p:nvSpPr>
+          <p:cNvPr id="59" name="Rectangle 58"/>
+          <p:cNvSpPr/>
+          <p:nvPr/>
+        </p:nvSpPr>
+        <p:spPr>
+          <a:xfrm>
+            <a:off x="4640000" y="3090000"/>
+            <a:ext cx="3300000" cy="480000"/>
+          </a:xfrm>
+          <a:prstGeom prst="rect">
+            <a:avLst/>
+          </a:prstGeom>
+          <a:solidFill>
+            <a:srgbClr val="E3FCDE"/>
+          </a:solidFill>
+          <a:ln w="6350">
+            <a:solidFill>
+              <a:srgbClr val="D5DBDB"/>
+            </a:solidFill>
+          </a:ln>
+        </p:spPr>
+        <p:style>
+          <a:lnRef idx="1">
+            <a:schemeClr val="accent1"/>
+          </a:lnRef>
+          <a:fillRef idx="3">
+            <a:schemeClr val="accent1"/>
+          </a:fillRef>
+          <a:effectRef idx="2">
+            <a:schemeClr val="accent1"/>
+          </a:effectRef>
+          <a:fontRef idx="minor">
+            <a:schemeClr val="lt1"/>
+          </a:fontRef>
+        </p:style>
+        <p:txBody>
+          <a:bodyPr rtlCol="0" anchor="ctr"/>
+          <a:lstStyle/>
+          <a:p>
+            <a:pPr algn="ctr"/>
+          </a:p>
+        </p:txBody>
+      </p:sp>
+      <p:sp>
+        <p:nvSpPr>
+          <p:cNvPr id="60" name="Rectangle 59"/>
+          <p:cNvSpPr/>
+          <p:nvPr/>
+        </p:nvSpPr>
+        <p:spPr>
+          <a:xfrm>
+            <a:off x="4720000" y="3190000"/>
+            <a:ext cx="260000" cy="260000"/>
+          </a:xfrm>
+          <a:prstGeom prst="rect">
+            <a:avLst/>
+          </a:prstGeom>
+          <a:solidFill>
+            <a:srgbClr val="1D8102"/>
+          </a:solidFill>
+          <a:ln>
+            <a:noFill/>
+          </a:ln>
+        </p:spPr>
+        <p:style>
+          <a:lnRef idx="1">
+            <a:schemeClr val="accent1"/>
+          </a:lnRef>
+          <a:fillRef idx="3">
+            <a:schemeClr val="accent1"/>
+          </a:fillRef>
+          <a:effectRef idx="2">
+            <a:schemeClr val="accent1"/>
+          </a:effectRef>
+          <a:fontRef idx="minor">
+            <a:schemeClr val="lt1"/>
+          </a:fontRef>
+        </p:style>
+        <p:txBody>
+          <a:bodyPr rtlCol="0" anchor="ctr" wrap="none"/>
+          <a:lstStyle/>
+          <a:p>
+            <a:pPr algn="ctr">
+              <a:spcBef>
+                <a:spcPts val="200"/>
+              </a:spcBef>
+              <a:defRPr sz="1200" b="1">
+                <a:solidFill>
+                  <a:srgbClr val="FFFFFF"/>
+                </a:solidFill>
+              </a:defRPr>
+            </a:pPr>
+            <a:r>
+              <a:t>4</a:t>
+            </a:r>
+          </a:p>
+        </p:txBody>
+      </p:sp>
+      <p:sp>
+        <p:nvSpPr>
+          <p:cNvPr id="61" name="TextBox 60"/>
+          <p:cNvSpPr txBox="1"/>
+          <p:nvPr/>
+        </p:nvSpPr>
+        <p:spPr>
+          <a:xfrm>
+            <a:off x="5060000" y="3150000"/>
+            <a:ext cx="2800000" cy="200000"/>
+          </a:xfrm>
+          <a:prstGeom prst="rect">
+            <a:avLst/>
+          </a:prstGeom>
+          <a:noFill/>
+        </p:spPr>
+        <p:txBody>
+          <a:bodyPr wrap="square">
+            <a:spAutoFit/>
+          </a:bodyPr>
+          <a:lstStyle/>
+          <a:p>
+            <a:pPr>
+              <a:defRPr sz="1100" b="1">
+                <a:solidFill>
+                  <a:srgbClr val="16191F"/>
+                </a:solidFill>
+              </a:defRPr>
+            </a:pPr>
+            <a:r>
+              <a:t>CADS Request</a:t>
+            </a:r>
+          </a:p>
+        </p:txBody>
+      </p:sp>
+      <p:sp>
+        <p:nvSpPr>
+          <p:cNvPr id="62" name="TextBox 61"/>
+          <p:cNvSpPr txBox="1"/>
+          <p:nvPr/>
+        </p:nvSpPr>
+        <p:spPr>
+          <a:xfrm>
+            <a:off x="5060000" y="3350000"/>
+            <a:ext cx="2800000" cy="200000"/>
+          </a:xfrm>
+          <a:prstGeom prst="rect">
+            <a:avLst/>
+          </a:prstGeom>
+          <a:noFill/>
+        </p:spPr>
+        <p:txBody>
+          <a:bodyPr wrap="square">
+            <a:spAutoFit/>
+          </a:bodyPr>
+          <a:lstStyle/>
+          <a:p>
+            <a:pPr>
+              <a:defRPr sz="900">
+                <a:solidFill>
+                  <a:srgbClr val="545B64"/>
+                </a:solidFill>
+              </a:defRPr>
+            </a:pPr>
+            <a:r>
+              <a:t>Submit Cloud Architecture &amp; Design Services request for multi-region review</a:t>
+            </a:r>
+          </a:p>
+        </p:txBody>
+      </p:sp>
+      <p:sp>
+        <p:nvSpPr>
+          <p:cNvPr id="63" name="Rectangle 62"/>
+          <p:cNvSpPr/>
+          <p:nvPr/>
+        </p:nvSpPr>
+        <p:spPr>
+          <a:xfrm>
+            <a:off x="8080000" y="1500000"/>
+            <a:ext cx="3300000" cy="480000"/>
+          </a:xfrm>
+          <a:prstGeom prst="rect">
+            <a:avLst/>
+          </a:prstGeom>
+          <a:solidFill>
+            <a:srgbClr val="E8F4FD"/>
+          </a:solidFill>
+          <a:ln w="6350">
+            <a:solidFill>
+              <a:srgbClr val="D5DBDB"/>
+            </a:solidFill>
+          </a:ln>
+        </p:spPr>
+        <p:style>
+          <a:lnRef idx="1">
+            <a:schemeClr val="accent1"/>
+          </a:lnRef>
+          <a:fillRef idx="3">
+            <a:schemeClr val="accent1"/>
+          </a:fillRef>
+          <a:effectRef idx="2">
+            <a:schemeClr val="accent1"/>
+          </a:effectRef>
+          <a:fontRef idx="minor">
+            <a:schemeClr val="lt1"/>
+          </a:fontRef>
+        </p:style>
+        <p:txBody>
+          <a:bodyPr rtlCol="0" anchor="ctr"/>
+          <a:lstStyle/>
+          <a:p>
+            <a:pPr algn="ctr"/>
+          </a:p>
+        </p:txBody>
+      </p:sp>
+      <p:sp>
+        <p:nvSpPr>
+          <p:cNvPr id="64" name="Rectangle 63"/>
+          <p:cNvSpPr/>
+          <p:nvPr/>
+        </p:nvSpPr>
+        <p:spPr>
+          <a:xfrm>
+            <a:off x="8160000" y="1600000"/>
+            <a:ext cx="260000" cy="260000"/>
+          </a:xfrm>
+          <a:prstGeom prst="rect">
+            <a:avLst/>
+          </a:prstGeom>
+          <a:solidFill>
+            <a:srgbClr val="0073BB"/>
+          </a:solidFill>
+          <a:ln>
+            <a:noFill/>
+          </a:ln>
+        </p:spPr>
+        <p:style>
+          <a:lnRef idx="1">
+            <a:schemeClr val="accent1"/>
+          </a:lnRef>
+          <a:fillRef idx="3">
+            <a:schemeClr val="accent1"/>
+          </a:fillRef>
+          <a:effectRef idx="2">
+            <a:schemeClr val="accent1"/>
+          </a:effectRef>
+          <a:fontRef idx="minor">
+            <a:schemeClr val="lt1"/>
+          </a:fontRef>
+        </p:style>
+        <p:txBody>
+          <a:bodyPr rtlCol="0" anchor="ctr" wrap="none"/>
+          <a:lstStyle/>
+          <a:p>
+            <a:pPr algn="ctr">
+              <a:spcBef>
+                <a:spcPts val="200"/>
+              </a:spcBef>
+              <a:defRPr sz="1200" b="1">
+                <a:solidFill>
+                  <a:srgbClr val="FFFFFF"/>
+                </a:solidFill>
+              </a:defRPr>
+            </a:pPr>
+            <a:r>
+              <a:t>1</a:t>
+            </a:r>
+          </a:p>
+        </p:txBody>
+      </p:sp>
+      <p:sp>
+        <p:nvSpPr>
+          <p:cNvPr id="65" name="TextBox 64"/>
+          <p:cNvSpPr txBox="1"/>
+          <p:nvPr/>
+        </p:nvSpPr>
+        <p:spPr>
+          <a:xfrm>
+            <a:off x="8500000" y="1560000"/>
+            <a:ext cx="2800000" cy="200000"/>
+          </a:xfrm>
+          <a:prstGeom prst="rect">
+            <a:avLst/>
+          </a:prstGeom>
+          <a:noFill/>
+        </p:spPr>
+        <p:txBody>
+          <a:bodyPr wrap="square">
+            <a:spAutoFit/>
+          </a:bodyPr>
+          <a:lstStyle/>
+          <a:p>
+            <a:pPr>
+              <a:defRPr sz="1100" b="1">
+                <a:solidFill>
+                  <a:srgbClr val="16191F"/>
+                </a:solidFill>
+              </a:defRPr>
+            </a:pPr>
+            <a:r>
+              <a:t>Setup US-WEST-2</a:t>
+            </a:r>
+          </a:p>
+        </p:txBody>
+      </p:sp>
+      <p:sp>
+        <p:nvSpPr>
+          <p:cNvPr id="66" name="TextBox 65"/>
+          <p:cNvSpPr txBox="1"/>
+          <p:nvPr/>
+        </p:nvSpPr>
+        <p:spPr>
+          <a:xfrm>
+            <a:off x="8500000" y="1760000"/>
+            <a:ext cx="2800000" cy="200000"/>
+          </a:xfrm>
+          <a:prstGeom prst="rect">
+            <a:avLst/>
+          </a:prstGeom>
+          <a:noFill/>
+        </p:spPr>
+        <p:txBody>
+          <a:bodyPr wrap="square">
+            <a:spAutoFit/>
+          </a:bodyPr>
+          <a:lstStyle/>
+          <a:p>
+            <a:pPr>
+              <a:defRPr sz="900">
+                <a:solidFill>
+                  <a:srgbClr val="545B64"/>
+                </a:solidFill>
+              </a:defRPr>
+            </a:pPr>
+            <a:r>
+              <a:t>Provision consumer AWS resources, VPCs, and IAM policies</a:t>
+            </a:r>
+          </a:p>
+        </p:txBody>
+      </p:sp>
+      <p:sp>
+        <p:nvSpPr>
+          <p:cNvPr id="67" name="Rectangle 66"/>
+          <p:cNvSpPr/>
+          <p:nvPr/>
+        </p:nvSpPr>
+        <p:spPr>
+          <a:xfrm>
+            <a:off x="8080000" y="2030000"/>
+            <a:ext cx="3300000" cy="480000"/>
+          </a:xfrm>
+          <a:prstGeom prst="rect">
+            <a:avLst/>
+          </a:prstGeom>
+          <a:solidFill>
+            <a:srgbClr val="E8F4FD"/>
+          </a:solidFill>
+          <a:ln w="6350">
+            <a:solidFill>
+              <a:srgbClr val="D5DBDB"/>
+            </a:solidFill>
+          </a:ln>
+        </p:spPr>
+        <p:style>
+          <a:lnRef idx="1">
+            <a:schemeClr val="accent1"/>
+          </a:lnRef>
+          <a:fillRef idx="3">
+            <a:schemeClr val="accent1"/>
+          </a:fillRef>
+          <a:effectRef idx="2">
+            <a:schemeClr val="accent1"/>
+          </a:effectRef>
+          <a:fontRef idx="minor">
+            <a:schemeClr val="lt1"/>
+          </a:fontRef>
+        </p:style>
+        <p:txBody>
+          <a:bodyPr rtlCol="0" anchor="ctr"/>
+          <a:lstStyle/>
+          <a:p>
+            <a:pPr algn="ctr"/>
+          </a:p>
+        </p:txBody>
+      </p:sp>
+      <p:sp>
+        <p:nvSpPr>
+          <p:cNvPr id="68" name="Rectangle 67"/>
+          <p:cNvSpPr/>
+          <p:nvPr/>
+        </p:nvSpPr>
+        <p:spPr>
+          <a:xfrm>
+            <a:off x="8160000" y="2130000"/>
+            <a:ext cx="260000" cy="260000"/>
+          </a:xfrm>
+          <a:prstGeom prst="rect">
+            <a:avLst/>
+          </a:prstGeom>
+          <a:solidFill>
+            <a:srgbClr val="0073BB"/>
+          </a:solidFill>
+          <a:ln>
+            <a:noFill/>
+          </a:ln>
+        </p:spPr>
+        <p:style>
+          <a:lnRef idx="1">
+            <a:schemeClr val="accent1"/>
+          </a:lnRef>
+          <a:fillRef idx="3">
+            <a:schemeClr val="accent1"/>
+          </a:fillRef>
+          <a:effectRef idx="2">
+            <a:schemeClr val="accent1"/>
+          </a:effectRef>
+          <a:fontRef idx="minor">
+            <a:schemeClr val="lt1"/>
+          </a:fontRef>
+        </p:style>
+        <p:txBody>
+          <a:bodyPr rtlCol="0" anchor="ctr" wrap="none"/>
+          <a:lstStyle/>
+          <a:p>
+            <a:pPr algn="ctr">
+              <a:spcBef>
+                <a:spcPts val="200"/>
+              </a:spcBef>
+              <a:defRPr sz="1200" b="1">
+                <a:solidFill>
+                  <a:srgbClr val="FFFFFF"/>
+                </a:solidFill>
+              </a:defRPr>
+            </a:pPr>
+            <a:r>
+              <a:t>2</a:t>
+            </a:r>
+          </a:p>
+        </p:txBody>
+      </p:sp>
+      <p:sp>
+        <p:nvSpPr>
+          <p:cNvPr id="69" name="TextBox 68"/>
+          <p:cNvSpPr txBox="1"/>
+          <p:nvPr/>
+        </p:nvSpPr>
+        <p:spPr>
+          <a:xfrm>
+            <a:off x="8500000" y="2090000"/>
+            <a:ext cx="2800000" cy="200000"/>
+          </a:xfrm>
+          <a:prstGeom prst="rect">
+            <a:avLst/>
+          </a:prstGeom>
+          <a:noFill/>
+        </p:spPr>
+        <p:txBody>
+          <a:bodyPr wrap="square">
+            <a:spAutoFit/>
+          </a:bodyPr>
+          <a:lstStyle/>
+          <a:p>
+            <a:pPr>
+              <a:defRPr sz="1100" b="1">
+                <a:solidFill>
+                  <a:srgbClr val="16191F"/>
+                </a:solidFill>
+              </a:defRPr>
+            </a:pPr>
+            <a:r>
+              <a:t>Setup Consumer Pipeline in US-WEST-2</a:t>
+            </a:r>
+          </a:p>
+        </p:txBody>
+      </p:sp>
+      <p:sp>
+        <p:nvSpPr>
+          <p:cNvPr id="70" name="TextBox 69"/>
+          <p:cNvSpPr txBox="1"/>
+          <p:nvPr/>
+        </p:nvSpPr>
+        <p:spPr>
+          <a:xfrm>
+            <a:off x="8500000" y="2290000"/>
+            <a:ext cx="2800000" cy="200000"/>
+          </a:xfrm>
+          <a:prstGeom prst="rect">
+            <a:avLst/>
+          </a:prstGeom>
+          <a:noFill/>
+        </p:spPr>
+        <p:txBody>
+          <a:bodyPr wrap="square">
+            <a:spAutoFit/>
+          </a:bodyPr>
+          <a:lstStyle/>
+          <a:p>
+            <a:pPr>
+              <a:defRPr sz="900">
+                <a:solidFill>
+                  <a:srgbClr val="545B64"/>
+                </a:solidFill>
+              </a:defRPr>
+            </a:pPr>
+            <a:r>
+              <a:t>Deploy and configure data consumption pipelines in the secondary region</a:t>
+            </a:r>
+          </a:p>
+        </p:txBody>
+      </p:sp>
+      <p:sp>
+        <p:nvSpPr>
+          <p:cNvPr id="71" name="Rectangle 70"/>
+          <p:cNvSpPr/>
+          <p:nvPr/>
+        </p:nvSpPr>
+        <p:spPr>
+          <a:xfrm>
+            <a:off x="8080000" y="2560000"/>
+            <a:ext cx="3300000" cy="480000"/>
+          </a:xfrm>
+          <a:prstGeom prst="rect">
+            <a:avLst/>
+          </a:prstGeom>
+          <a:solidFill>
+            <a:srgbClr val="E8F4FD"/>
+          </a:solidFill>
+          <a:ln w="6350">
+            <a:solidFill>
+              <a:srgbClr val="D5DBDB"/>
+            </a:solidFill>
+          </a:ln>
+        </p:spPr>
+        <p:style>
+          <a:lnRef idx="1">
+            <a:schemeClr val="accent1"/>
+          </a:lnRef>
+          <a:fillRef idx="3">
+            <a:schemeClr val="accent1"/>
+          </a:fillRef>
+          <a:effectRef idx="2">
+            <a:schemeClr val="accent1"/>
+          </a:effectRef>
+          <a:fontRef idx="minor">
+            <a:schemeClr val="lt1"/>
+          </a:fontRef>
+        </p:style>
+        <p:txBody>
+          <a:bodyPr rtlCol="0" anchor="ctr"/>
+          <a:lstStyle/>
+          <a:p>
+            <a:pPr algn="ctr"/>
+          </a:p>
+        </p:txBody>
+      </p:sp>
+      <p:sp>
+        <p:nvSpPr>
+          <p:cNvPr id="72" name="Rectangle 71"/>
+          <p:cNvSpPr/>
+          <p:nvPr/>
+        </p:nvSpPr>
+        <p:spPr>
+          <a:xfrm>
+            <a:off x="8160000" y="2660000"/>
+            <a:ext cx="260000" cy="260000"/>
+          </a:xfrm>
+          <a:prstGeom prst="rect">
+            <a:avLst/>
+          </a:prstGeom>
+          <a:solidFill>
+            <a:srgbClr val="0073BB"/>
+          </a:solidFill>
+          <a:ln>
+            <a:noFill/>
+          </a:ln>
+        </p:spPr>
+        <p:style>
+          <a:lnRef idx="1">
+            <a:schemeClr val="accent1"/>
+          </a:lnRef>
+          <a:fillRef idx="3">
+            <a:schemeClr val="accent1"/>
+          </a:fillRef>
+          <a:effectRef idx="2">
+            <a:schemeClr val="accent1"/>
+          </a:effectRef>
+          <a:fontRef idx="minor">
+            <a:schemeClr val="lt1"/>
+          </a:fontRef>
+        </p:style>
+        <p:txBody>
+          <a:bodyPr rtlCol="0" anchor="ctr" wrap="none"/>
+          <a:lstStyle/>
+          <a:p>
+            <a:pPr algn="ctr">
+              <a:spcBef>
+                <a:spcPts val="200"/>
+              </a:spcBef>
+              <a:defRPr sz="1200" b="1">
+                <a:solidFill>
+                  <a:srgbClr val="FFFFFF"/>
+                </a:solidFill>
+              </a:defRPr>
+            </a:pPr>
+            <a:r>
+              <a:t>3</a:t>
+            </a:r>
+          </a:p>
+        </p:txBody>
+      </p:sp>
+      <p:sp>
+        <p:nvSpPr>
+          <p:cNvPr id="73" name="TextBox 72"/>
+          <p:cNvSpPr txBox="1"/>
+          <p:nvPr/>
+        </p:nvSpPr>
+        <p:spPr>
+          <a:xfrm>
+            <a:off x="8500000" y="2620000"/>
+            <a:ext cx="2800000" cy="200000"/>
+          </a:xfrm>
+          <a:prstGeom prst="rect">
+            <a:avLst/>
+          </a:prstGeom>
+          <a:noFill/>
+        </p:spPr>
+        <p:txBody>
+          <a:bodyPr wrap="square">
+            <a:spAutoFit/>
+          </a:bodyPr>
+          <a:lstStyle/>
+          <a:p>
+            <a:pPr>
+              <a:defRPr sz="1100" b="1">
+                <a:solidFill>
+                  <a:srgbClr val="16191F"/>
+                </a:solidFill>
+              </a:defRPr>
+            </a:pPr>
+            <a:r>
+              <a:t>Setup SNS-SQS Connectivity on US-WEST-2</a:t>
+            </a:r>
+          </a:p>
+        </p:txBody>
+      </p:sp>
+      <p:sp>
+        <p:nvSpPr>
+          <p:cNvPr id="74" name="TextBox 73"/>
+          <p:cNvSpPr txBox="1"/>
+          <p:nvPr/>
+        </p:nvSpPr>
+        <p:spPr>
+          <a:xfrm>
+            <a:off x="8500000" y="2820000"/>
+            <a:ext cx="2800000" cy="200000"/>
+          </a:xfrm>
+          <a:prstGeom prst="rect">
+            <a:avLst/>
+          </a:prstGeom>
+          <a:noFill/>
+        </p:spPr>
+        <p:txBody>
+          <a:bodyPr wrap="square">
+            <a:spAutoFit/>
+          </a:bodyPr>
+          <a:lstStyle/>
+          <a:p>
+            <a:pPr>
+              <a:defRPr sz="900">
+                <a:solidFill>
+                  <a:srgbClr val="545B64"/>
+                </a:solidFill>
+              </a:defRPr>
+            </a:pPr>
+            <a:r>
+              <a:t>Configure SNS subscriptions and SQS queues for notifications</a:t>
+            </a:r>
+          </a:p>
+        </p:txBody>
+      </p:sp>
+      <p:sp>
+        <p:nvSpPr>
+          <p:cNvPr id="75" name="Rectangle 74"/>
+          <p:cNvSpPr/>
+          <p:nvPr/>
+        </p:nvSpPr>
+        <p:spPr>
+          <a:xfrm>
+            <a:off x="8080000" y="3090000"/>
+            <a:ext cx="3300000" cy="480000"/>
+          </a:xfrm>
+          <a:prstGeom prst="rect">
+            <a:avLst/>
+          </a:prstGeom>
+          <a:solidFill>
+            <a:srgbClr val="E8F4FD"/>
+          </a:solidFill>
+          <a:ln w="6350">
+            <a:solidFill>
+              <a:srgbClr val="D5DBDB"/>
+            </a:solidFill>
+          </a:ln>
+        </p:spPr>
+        <p:style>
+          <a:lnRef idx="1">
+            <a:schemeClr val="accent1"/>
+          </a:lnRef>
+          <a:fillRef idx="3">
+            <a:schemeClr val="accent1"/>
+          </a:fillRef>
+          <a:effectRef idx="2">
+            <a:schemeClr val="accent1"/>
+          </a:effectRef>
+          <a:fontRef idx="minor">
+            <a:schemeClr val="lt1"/>
+          </a:fontRef>
+        </p:style>
+        <p:txBody>
+          <a:bodyPr rtlCol="0" anchor="ctr"/>
+          <a:lstStyle/>
+          <a:p>
+            <a:pPr algn="ctr"/>
+          </a:p>
+        </p:txBody>
+      </p:sp>
+      <p:sp>
+        <p:nvSpPr>
+          <p:cNvPr id="76" name="Rectangle 75"/>
+          <p:cNvSpPr/>
+          <p:nvPr/>
+        </p:nvSpPr>
+        <p:spPr>
+          <a:xfrm>
+            <a:off x="8160000" y="3190000"/>
+            <a:ext cx="260000" cy="260000"/>
+          </a:xfrm>
+          <a:prstGeom prst="rect">
+            <a:avLst/>
+          </a:prstGeom>
+          <a:solidFill>
+            <a:srgbClr val="0073BB"/>
+          </a:solidFill>
+          <a:ln>
+            <a:noFill/>
+          </a:ln>
+        </p:spPr>
+        <p:style>
+          <a:lnRef idx="1">
+            <a:schemeClr val="accent1"/>
+          </a:lnRef>
+          <a:fillRef idx="3">
+            <a:schemeClr val="accent1"/>
+          </a:fillRef>
+          <a:effectRef idx="2">
+            <a:schemeClr val="accent1"/>
+          </a:effectRef>
+          <a:fontRef idx="minor">
+            <a:schemeClr val="lt1"/>
+          </a:fontRef>
+        </p:style>
+        <p:txBody>
+          <a:bodyPr rtlCol="0" anchor="ctr" wrap="none"/>
+          <a:lstStyle/>
+          <a:p>
+            <a:pPr algn="ctr">
+              <a:spcBef>
+                <a:spcPts val="200"/>
+              </a:spcBef>
+              <a:defRPr sz="1200" b="1">
+                <a:solidFill>
+                  <a:srgbClr val="FFFFFF"/>
+                </a:solidFill>
+              </a:defRPr>
+            </a:pPr>
+            <a:r>
+              <a:t>4</a:t>
+            </a:r>
+          </a:p>
+        </p:txBody>
+      </p:sp>
+      <p:sp>
+        <p:nvSpPr>
+          <p:cNvPr id="77" name="TextBox 76"/>
+          <p:cNvSpPr txBox="1"/>
+          <p:nvPr/>
+        </p:nvSpPr>
+        <p:spPr>
+          <a:xfrm>
+            <a:off x="8500000" y="3150000"/>
+            <a:ext cx="2800000" cy="200000"/>
+          </a:xfrm>
+          <a:prstGeom prst="rect">
+            <a:avLst/>
+          </a:prstGeom>
+          <a:noFill/>
+        </p:spPr>
+        <p:txBody>
+          <a:bodyPr wrap="square">
+            <a:spAutoFit/>
+          </a:bodyPr>
+          <a:lstStyle/>
+          <a:p>
+            <a:pPr>
+              <a:defRPr sz="1100" b="1">
+                <a:solidFill>
+                  <a:srgbClr val="16191F"/>
+                </a:solidFill>
+              </a:defRPr>
+            </a:pPr>
+            <a:r>
+              <a:t>Update Connections to Global URLs</a:t>
+            </a:r>
+          </a:p>
+        </p:txBody>
+      </p:sp>
+      <p:sp>
+        <p:nvSpPr>
+          <p:cNvPr id="78" name="TextBox 77"/>
+          <p:cNvSpPr txBox="1"/>
+          <p:nvPr/>
+        </p:nvSpPr>
+        <p:spPr>
+          <a:xfrm>
+            <a:off x="8500000" y="3350000"/>
+            <a:ext cx="2800000" cy="200000"/>
+          </a:xfrm>
+          <a:prstGeom prst="rect">
+            <a:avLst/>
+          </a:prstGeom>
+          <a:noFill/>
+        </p:spPr>
+        <p:txBody>
+          <a:bodyPr wrap="square">
+            <a:spAutoFit/>
+          </a:bodyPr>
+          <a:lstStyle/>
+          <a:p>
+            <a:pPr>
+              <a:defRPr sz="900">
+                <a:solidFill>
+                  <a:srgbClr val="545B64"/>
+                </a:solidFill>
+              </a:defRPr>
+            </a:pPr>
+            <a:r>
+              <a:t>Switch compute endpoints from region-specific to global URLs for failover</a:t>
             </a:r>
           </a:p>
         </p:txBody>
